--- a/public/fun/pack/pptx/wedding/결혼식_43_식순중심_설날세배.pptx
+++ b/public/fun/pack/pptx/wedding/결혼식_43_식순중심_설날세배.pptx
@@ -3286,14 +3286,6 @@
 <file path=ppt/slides/slide1.xml><?xml version="1.0" encoding="utf-8"?>
 <p:sld xmlns:a="http://schemas.openxmlformats.org/drawingml/2006/main" xmlns:p="http://schemas.openxmlformats.org/presentationml/2006/main" xmlns:r="http://schemas.openxmlformats.org/officeDocument/2006/relationships">
   <p:cSld>
-    <p:bg>
-      <p:bgPr>
-        <a:solidFill>
-          <a:srgbClr val="FFFFFF"/>
-        </a:solidFill>
-        <a:effectLst/>
-      </p:bgPr>
-    </p:bg>
     <p:spTree>
       <p:nvGrpSpPr>
         <p:cNvPr id="1" name=""/>
@@ -3301,325 +3293,30 @@
         <p:nvPr/>
       </p:nvGrpSpPr>
       <p:grpSpPr/>
-      <p:sp>
-        <p:nvSpPr>
-          <p:cNvPr id="3" name="장식"/>
-          <p:cNvSpPr/>
+      <p:pic>
+        <p:nvPicPr>
+          <p:cNvPr id="3" name="표지 그림" descr="wedding-43.jpg"/>
+          <p:cNvPicPr>
+            <a:picLocks noChangeAspect="1"/>
+          </p:cNvPicPr>
           <p:nvPr/>
-        </p:nvSpPr>
-        <p:spPr>
-          <a:xfrm>
-            <a:off x="-274320" y="4251960"/>
-            <a:ext cx="12740335" cy="2743200"/>
-          </a:xfrm>
-          <a:prstGeom prst="wave">
-            <a:avLst/>
-          </a:prstGeom>
-          <a:solidFill>
-            <a:srgbClr val="F0D1D6"/>
-          </a:solidFill>
-          <a:ln>
-            <a:noFill/>
-          </a:ln>
-        </p:spPr>
-        <p:txBody>
-          <a:bodyPr rtlCol="0" anchor="ctr"/>
-          <a:lstStyle/>
-          <a:p>
-            <a:pPr algn="ctr"/>
-          </a:p>
-        </p:txBody>
-      </p:sp>
-      <p:sp>
-        <p:nvSpPr>
-          <p:cNvPr id="4" name="장식"/>
-          <p:cNvSpPr/>
-          <p:nvPr/>
-        </p:nvSpPr>
-        <p:spPr>
-          <a:xfrm>
-            <a:off x="-274320" y="5074920"/>
-            <a:ext cx="12740335" cy="2331720"/>
-          </a:xfrm>
-          <a:prstGeom prst="wave">
-            <a:avLst/>
-          </a:prstGeom>
-          <a:solidFill>
-            <a:srgbClr val="8D3443"/>
-          </a:solidFill>
-          <a:ln>
-            <a:noFill/>
-          </a:ln>
-        </p:spPr>
-        <p:txBody>
-          <a:bodyPr rtlCol="0" anchor="ctr"/>
-          <a:lstStyle/>
-          <a:p>
-            <a:pPr algn="ctr"/>
-          </a:p>
-        </p:txBody>
-      </p:sp>
-      <p:sp>
-        <p:nvSpPr>
-          <p:cNvPr id="5" name="장식"/>
-          <p:cNvSpPr/>
-          <p:nvPr/>
-        </p:nvSpPr>
-        <p:spPr>
-          <a:xfrm>
-            <a:off x="8543294" y="1234440"/>
-            <a:ext cx="822959" cy="1371600"/>
-          </a:xfrm>
-          <a:prstGeom prst="roundRect">
-            <a:avLst/>
-          </a:prstGeom>
-          <a:solidFill>
-            <a:srgbClr val="8D3443"/>
-          </a:solidFill>
-          <a:ln>
-            <a:noFill/>
-          </a:ln>
-        </p:spPr>
-        <p:txBody>
-          <a:bodyPr rtlCol="0" anchor="ctr"/>
-          <a:lstStyle/>
-          <a:p>
-            <a:pPr algn="ctr"/>
-          </a:p>
-        </p:txBody>
-      </p:sp>
-      <p:sp>
-        <p:nvSpPr>
-          <p:cNvPr id="6" name="장식"/>
-          <p:cNvSpPr/>
-          <p:nvPr/>
-        </p:nvSpPr>
-        <p:spPr>
-          <a:xfrm>
-            <a:off x="8749034" y="1097280"/>
-            <a:ext cx="411479" cy="137160"/>
+        </p:nvPicPr>
+        <p:blipFill>
+          <a:blip r:embed="rId2"/>
+          <a:stretch>
+            <a:fillRect/>
+          </a:stretch>
+        </p:blipFill>
+        <p:spPr>
+          <a:xfrm>
+            <a:off x="0" y="0"/>
+            <a:ext cx="12191695" cy="6858000"/>
           </a:xfrm>
           <a:prstGeom prst="rect">
             <a:avLst/>
           </a:prstGeom>
-          <a:solidFill>
-            <a:srgbClr val="3B9158"/>
-          </a:solidFill>
-          <a:ln>
-            <a:noFill/>
-          </a:ln>
-        </p:spPr>
-        <p:txBody>
-          <a:bodyPr rtlCol="0" anchor="ctr"/>
-          <a:lstStyle/>
-          <a:p>
-            <a:pPr algn="ctr"/>
-          </a:p>
-        </p:txBody>
-      </p:sp>
-      <p:sp>
-        <p:nvSpPr>
-          <p:cNvPr id="7" name="장식"/>
-          <p:cNvSpPr/>
-          <p:nvPr/>
-        </p:nvSpPr>
-        <p:spPr>
-          <a:xfrm>
-            <a:off x="8749034" y="2606040"/>
-            <a:ext cx="411479" cy="137160"/>
-          </a:xfrm>
-          <a:prstGeom prst="rect">
-            <a:avLst/>
-          </a:prstGeom>
-          <a:solidFill>
-            <a:srgbClr val="3B9158"/>
-          </a:solidFill>
-          <a:ln>
-            <a:noFill/>
-          </a:ln>
-        </p:spPr>
-        <p:txBody>
-          <a:bodyPr rtlCol="0" anchor="ctr"/>
-          <a:lstStyle/>
-          <a:p>
-            <a:pPr algn="ctr"/>
-          </a:p>
-        </p:txBody>
-      </p:sp>
-      <p:sp>
-        <p:nvSpPr>
-          <p:cNvPr id="8" name="장식"/>
-          <p:cNvSpPr/>
-          <p:nvPr/>
-        </p:nvSpPr>
-        <p:spPr>
-          <a:xfrm>
-            <a:off x="9585710" y="1728216"/>
-            <a:ext cx="822959" cy="1152144"/>
-          </a:xfrm>
-          <a:prstGeom prst="roundRect">
-            <a:avLst/>
-          </a:prstGeom>
-          <a:solidFill>
-            <a:srgbClr val="F0D1D6"/>
-          </a:solidFill>
-          <a:ln>
-            <a:noFill/>
-          </a:ln>
-        </p:spPr>
-        <p:txBody>
-          <a:bodyPr rtlCol="0" anchor="ctr"/>
-          <a:lstStyle/>
-          <a:p>
-            <a:pPr algn="ctr"/>
-          </a:p>
-        </p:txBody>
-      </p:sp>
-      <p:sp>
-        <p:nvSpPr>
-          <p:cNvPr id="9" name="장식"/>
-          <p:cNvSpPr/>
-          <p:nvPr/>
-        </p:nvSpPr>
-        <p:spPr>
-          <a:xfrm>
-            <a:off x="9791450" y="1591056"/>
-            <a:ext cx="411479" cy="137160"/>
-          </a:xfrm>
-          <a:prstGeom prst="rect">
-            <a:avLst/>
-          </a:prstGeom>
-          <a:solidFill>
-            <a:srgbClr val="3B9158"/>
-          </a:solidFill>
-          <a:ln>
-            <a:noFill/>
-          </a:ln>
-        </p:spPr>
-        <p:txBody>
-          <a:bodyPr rtlCol="0" anchor="ctr"/>
-          <a:lstStyle/>
-          <a:p>
-            <a:pPr algn="ctr"/>
-          </a:p>
-        </p:txBody>
-      </p:sp>
-      <p:sp>
-        <p:nvSpPr>
-          <p:cNvPr id="10" name="장식"/>
-          <p:cNvSpPr/>
-          <p:nvPr/>
-        </p:nvSpPr>
-        <p:spPr>
-          <a:xfrm>
-            <a:off x="9791450" y="2880360"/>
-            <a:ext cx="411479" cy="137160"/>
-          </a:xfrm>
-          <a:prstGeom prst="rect">
-            <a:avLst/>
-          </a:prstGeom>
-          <a:solidFill>
-            <a:srgbClr val="3B9158"/>
-          </a:solidFill>
-          <a:ln>
-            <a:noFill/>
-          </a:ln>
-        </p:spPr>
-        <p:txBody>
-          <a:bodyPr rtlCol="0" anchor="ctr"/>
-          <a:lstStyle/>
-          <a:p>
-            <a:pPr algn="ctr"/>
-          </a:p>
-        </p:txBody>
-      </p:sp>
-      <p:sp>
-        <p:nvSpPr>
-          <p:cNvPr id="11" name="장식"/>
-          <p:cNvSpPr/>
-          <p:nvPr/>
-        </p:nvSpPr>
-        <p:spPr>
-          <a:xfrm>
-            <a:off x="10628126" y="1234440"/>
-            <a:ext cx="822959" cy="1371600"/>
-          </a:xfrm>
-          <a:prstGeom prst="roundRect">
-            <a:avLst/>
-          </a:prstGeom>
-          <a:solidFill>
-            <a:srgbClr val="3B9158"/>
-          </a:solidFill>
-          <a:ln>
-            <a:noFill/>
-          </a:ln>
-        </p:spPr>
-        <p:txBody>
-          <a:bodyPr rtlCol="0" anchor="ctr"/>
-          <a:lstStyle/>
-          <a:p>
-            <a:pPr algn="ctr"/>
-          </a:p>
-        </p:txBody>
-      </p:sp>
-      <p:sp>
-        <p:nvSpPr>
-          <p:cNvPr id="12" name="장식"/>
-          <p:cNvSpPr/>
-          <p:nvPr/>
-        </p:nvSpPr>
-        <p:spPr>
-          <a:xfrm>
-            <a:off x="10833866" y="1097280"/>
-            <a:ext cx="411479" cy="137160"/>
-          </a:xfrm>
-          <a:prstGeom prst="rect">
-            <a:avLst/>
-          </a:prstGeom>
-          <a:solidFill>
-            <a:srgbClr val="8D3443"/>
-          </a:solidFill>
-          <a:ln>
-            <a:noFill/>
-          </a:ln>
-        </p:spPr>
-        <p:txBody>
-          <a:bodyPr rtlCol="0" anchor="ctr"/>
-          <a:lstStyle/>
-          <a:p>
-            <a:pPr algn="ctr"/>
-          </a:p>
-        </p:txBody>
-      </p:sp>
-      <p:sp>
-        <p:nvSpPr>
-          <p:cNvPr id="13" name="장식"/>
-          <p:cNvSpPr/>
-          <p:nvPr/>
-        </p:nvSpPr>
-        <p:spPr>
-          <a:xfrm>
-            <a:off x="10833866" y="2606040"/>
-            <a:ext cx="411479" cy="137160"/>
-          </a:xfrm>
-          <a:prstGeom prst="rect">
-            <a:avLst/>
-          </a:prstGeom>
-          <a:solidFill>
-            <a:srgbClr val="8D3443"/>
-          </a:solidFill>
-          <a:ln>
-            <a:noFill/>
-          </a:ln>
-        </p:spPr>
-        <p:txBody>
-          <a:bodyPr rtlCol="0" anchor="ctr"/>
-          <a:lstStyle/>
-          <a:p>
-            <a:pPr algn="ctr"/>
-          </a:p>
-        </p:txBody>
-      </p:sp>
+        </p:spPr>
+      </p:pic>
       <p:sp>
         <p:nvSpPr>
           <p:cNvPr id="2" name="Title 1"/>
@@ -3632,8 +3329,8 @@
         </p:nvSpPr>
         <p:spPr>
           <a:xfrm>
-            <a:off x="975335" y="1371600"/>
-            <a:ext cx="7558851" cy="1463040"/>
+            <a:off x="853418" y="2057400"/>
+            <a:ext cx="6095847" cy="1554480"/>
           </a:xfrm>
         </p:spPr>
         <p:txBody>
@@ -3653,21 +3350,21 @@
                   <a:srgbClr val="431920"/>
                 </a:solidFill>
               </a:rPr>
-              <a:t>두 사람이 하나 되는 날</a:t>
-            </a:r>
-          </a:p>
-        </p:txBody>
-      </p:sp>
-      <p:sp>
-        <p:nvSpPr>
-          <p:cNvPr id="14" name="한 줄 문구"/>
+              <a:t>저희 결혼합니다</a:t>
+            </a:r>
+          </a:p>
+        </p:txBody>
+      </p:sp>
+      <p:sp>
+        <p:nvSpPr>
+          <p:cNvPr id="4" name="한 줄 문구"/>
           <p:cNvSpPr txBox="1"/>
           <p:nvPr/>
         </p:nvSpPr>
         <p:spPr>
           <a:xfrm>
-            <a:off x="975335" y="2926080"/>
-            <a:ext cx="7315017" cy="822960"/>
+            <a:off x="853418" y="3749039"/>
+            <a:ext cx="6095847" cy="822960"/>
           </a:xfrm>
           <a:prstGeom prst="rect">
             <a:avLst/>
@@ -3691,21 +3388,21 @@
                   <a:srgbClr val="431920"/>
                 </a:solidFill>
               </a:rPr>
-              <a:t>새해 첫날, 부부가 되었습니다</a:t>
-            </a:r>
-          </a:p>
-        </p:txBody>
-      </p:sp>
-      <p:sp>
-        <p:nvSpPr>
-          <p:cNvPr id="15" name="안내 문구"/>
+              <a:t>겨울이라 실내에서만 진행합니다</a:t>
+            </a:r>
+          </a:p>
+        </p:txBody>
+      </p:sp>
+      <p:sp>
+        <p:nvSpPr>
+          <p:cNvPr id="5" name="안내 문구"/>
           <p:cNvSpPr txBox="1"/>
           <p:nvPr/>
         </p:nvSpPr>
         <p:spPr>
           <a:xfrm>
-            <a:off x="975335" y="3794760"/>
-            <a:ext cx="7315017" cy="914400"/>
+            <a:off x="853418" y="4617720"/>
+            <a:ext cx="6095847" cy="914400"/>
           </a:xfrm>
           <a:prstGeom prst="rect">
             <a:avLst/>
@@ -3744,7 +3441,7 @@
                   <a:srgbClr val="666666"/>
                 </a:solidFill>
               </a:rPr>
-              <a:t>2026. 00. 00 · 예식장 이름</a:t>
+              <a:t>2027. 00. 00 · 예식장 이름</a:t>
             </a:r>
           </a:p>
         </p:txBody>
@@ -3835,267 +3532,6 @@
       </p:sp>
       <p:sp>
         <p:nvSpPr>
-          <p:cNvPr id="5" name="장식"/>
-          <p:cNvSpPr/>
-          <p:nvPr/>
-        </p:nvSpPr>
-        <p:spPr>
-          <a:xfrm>
-            <a:off x="10789920" y="525780"/>
-            <a:ext cx="301752" cy="502920"/>
-          </a:xfrm>
-          <a:prstGeom prst="roundRect">
-            <a:avLst/>
-          </a:prstGeom>
-          <a:solidFill>
-            <a:srgbClr val="8D3443"/>
-          </a:solidFill>
-          <a:ln>
-            <a:noFill/>
-          </a:ln>
-        </p:spPr>
-        <p:txBody>
-          <a:bodyPr rtlCol="0" anchor="ctr"/>
-          <a:lstStyle/>
-          <a:p>
-            <a:pPr algn="ctr"/>
-          </a:p>
-        </p:txBody>
-      </p:sp>
-      <p:sp>
-        <p:nvSpPr>
-          <p:cNvPr id="6" name="장식"/>
-          <p:cNvSpPr/>
-          <p:nvPr/>
-        </p:nvSpPr>
-        <p:spPr>
-          <a:xfrm>
-            <a:off x="10865358" y="475487"/>
-            <a:ext cx="150876" cy="50292"/>
-          </a:xfrm>
-          <a:prstGeom prst="rect">
-            <a:avLst/>
-          </a:prstGeom>
-          <a:solidFill>
-            <a:srgbClr val="3B9158"/>
-          </a:solidFill>
-          <a:ln>
-            <a:noFill/>
-          </a:ln>
-        </p:spPr>
-        <p:txBody>
-          <a:bodyPr rtlCol="0" anchor="ctr"/>
-          <a:lstStyle/>
-          <a:p>
-            <a:pPr algn="ctr"/>
-          </a:p>
-        </p:txBody>
-      </p:sp>
-      <p:sp>
-        <p:nvSpPr>
-          <p:cNvPr id="7" name="장식"/>
-          <p:cNvSpPr/>
-          <p:nvPr/>
-        </p:nvSpPr>
-        <p:spPr>
-          <a:xfrm>
-            <a:off x="10865358" y="1028700"/>
-            <a:ext cx="150876" cy="50292"/>
-          </a:xfrm>
-          <a:prstGeom prst="rect">
-            <a:avLst/>
-          </a:prstGeom>
-          <a:solidFill>
-            <a:srgbClr val="3B9158"/>
-          </a:solidFill>
-          <a:ln>
-            <a:noFill/>
-          </a:ln>
-        </p:spPr>
-        <p:txBody>
-          <a:bodyPr rtlCol="0" anchor="ctr"/>
-          <a:lstStyle/>
-          <a:p>
-            <a:pPr algn="ctr"/>
-          </a:p>
-        </p:txBody>
-      </p:sp>
-      <p:sp>
-        <p:nvSpPr>
-          <p:cNvPr id="8" name="장식"/>
-          <p:cNvSpPr/>
-          <p:nvPr/>
-        </p:nvSpPr>
-        <p:spPr>
-          <a:xfrm>
-            <a:off x="11172139" y="706831"/>
-            <a:ext cx="301752" cy="422452"/>
-          </a:xfrm>
-          <a:prstGeom prst="roundRect">
-            <a:avLst/>
-          </a:prstGeom>
-          <a:solidFill>
-            <a:srgbClr val="F0D1D6"/>
-          </a:solidFill>
-          <a:ln>
-            <a:noFill/>
-          </a:ln>
-        </p:spPr>
-        <p:txBody>
-          <a:bodyPr rtlCol="0" anchor="ctr"/>
-          <a:lstStyle/>
-          <a:p>
-            <a:pPr algn="ctr"/>
-          </a:p>
-        </p:txBody>
-      </p:sp>
-      <p:sp>
-        <p:nvSpPr>
-          <p:cNvPr id="9" name="장식"/>
-          <p:cNvSpPr/>
-          <p:nvPr/>
-        </p:nvSpPr>
-        <p:spPr>
-          <a:xfrm>
-            <a:off x="11247577" y="656539"/>
-            <a:ext cx="150876" cy="50292"/>
-          </a:xfrm>
-          <a:prstGeom prst="rect">
-            <a:avLst/>
-          </a:prstGeom>
-          <a:solidFill>
-            <a:srgbClr val="3B9158"/>
-          </a:solidFill>
-          <a:ln>
-            <a:noFill/>
-          </a:ln>
-        </p:spPr>
-        <p:txBody>
-          <a:bodyPr rtlCol="0" anchor="ctr"/>
-          <a:lstStyle/>
-          <a:p>
-            <a:pPr algn="ctr"/>
-          </a:p>
-        </p:txBody>
-      </p:sp>
-      <p:sp>
-        <p:nvSpPr>
-          <p:cNvPr id="10" name="장식"/>
-          <p:cNvSpPr/>
-          <p:nvPr/>
-        </p:nvSpPr>
-        <p:spPr>
-          <a:xfrm>
-            <a:off x="11247577" y="1129284"/>
-            <a:ext cx="150876" cy="50292"/>
-          </a:xfrm>
-          <a:prstGeom prst="rect">
-            <a:avLst/>
-          </a:prstGeom>
-          <a:solidFill>
-            <a:srgbClr val="3B9158"/>
-          </a:solidFill>
-          <a:ln>
-            <a:noFill/>
-          </a:ln>
-        </p:spPr>
-        <p:txBody>
-          <a:bodyPr rtlCol="0" anchor="ctr"/>
-          <a:lstStyle/>
-          <a:p>
-            <a:pPr algn="ctr"/>
-          </a:p>
-        </p:txBody>
-      </p:sp>
-      <p:sp>
-        <p:nvSpPr>
-          <p:cNvPr id="11" name="장식"/>
-          <p:cNvSpPr/>
-          <p:nvPr/>
-        </p:nvSpPr>
-        <p:spPr>
-          <a:xfrm>
-            <a:off x="11554358" y="525780"/>
-            <a:ext cx="301752" cy="502920"/>
-          </a:xfrm>
-          <a:prstGeom prst="roundRect">
-            <a:avLst/>
-          </a:prstGeom>
-          <a:solidFill>
-            <a:srgbClr val="3B9158"/>
-          </a:solidFill>
-          <a:ln>
-            <a:noFill/>
-          </a:ln>
-        </p:spPr>
-        <p:txBody>
-          <a:bodyPr rtlCol="0" anchor="ctr"/>
-          <a:lstStyle/>
-          <a:p>
-            <a:pPr algn="ctr"/>
-          </a:p>
-        </p:txBody>
-      </p:sp>
-      <p:sp>
-        <p:nvSpPr>
-          <p:cNvPr id="12" name="장식"/>
-          <p:cNvSpPr/>
-          <p:nvPr/>
-        </p:nvSpPr>
-        <p:spPr>
-          <a:xfrm>
-            <a:off x="11629796" y="475487"/>
-            <a:ext cx="150876" cy="50292"/>
-          </a:xfrm>
-          <a:prstGeom prst="rect">
-            <a:avLst/>
-          </a:prstGeom>
-          <a:solidFill>
-            <a:srgbClr val="8D3443"/>
-          </a:solidFill>
-          <a:ln>
-            <a:noFill/>
-          </a:ln>
-        </p:spPr>
-        <p:txBody>
-          <a:bodyPr rtlCol="0" anchor="ctr"/>
-          <a:lstStyle/>
-          <a:p>
-            <a:pPr algn="ctr"/>
-          </a:p>
-        </p:txBody>
-      </p:sp>
-      <p:sp>
-        <p:nvSpPr>
-          <p:cNvPr id="13" name="장식"/>
-          <p:cNvSpPr/>
-          <p:nvPr/>
-        </p:nvSpPr>
-        <p:spPr>
-          <a:xfrm>
-            <a:off x="11629796" y="1028700"/>
-            <a:ext cx="150876" cy="50292"/>
-          </a:xfrm>
-          <a:prstGeom prst="rect">
-            <a:avLst/>
-          </a:prstGeom>
-          <a:solidFill>
-            <a:srgbClr val="8D3443"/>
-          </a:solidFill>
-          <a:ln>
-            <a:noFill/>
-          </a:ln>
-        </p:spPr>
-        <p:txBody>
-          <a:bodyPr rtlCol="0" anchor="ctr"/>
-          <a:lstStyle/>
-          <a:p>
-            <a:pPr algn="ctr"/>
-          </a:p>
-        </p:txBody>
-      </p:sp>
-      <p:sp>
-        <p:nvSpPr>
           <p:cNvPr id="2" name="Title 1"/>
           <p:cNvSpPr>
             <a:spLocks noGrp="1"/>
@@ -4134,7 +3570,7 @@
       </p:sp>
       <p:sp>
         <p:nvSpPr>
-          <p:cNvPr id="14" name="사진 자리"/>
+          <p:cNvPr id="5" name="사진 자리"/>
           <p:cNvSpPr/>
           <p:nvPr/>
         </p:nvSpPr>
@@ -4180,7 +3616,7 @@
       </p:sp>
       <p:sp>
         <p:nvSpPr>
-          <p:cNvPr id="15" name="TextBox 14"/>
+          <p:cNvPr id="6" name="TextBox 5"/>
           <p:cNvSpPr txBox="1"/>
           <p:nvPr/>
         </p:nvSpPr>
@@ -4218,7 +3654,7 @@
       </p:sp>
       <p:sp>
         <p:nvSpPr>
-          <p:cNvPr id="16" name="TextBox 15"/>
+          <p:cNvPr id="7" name="TextBox 6"/>
           <p:cNvSpPr txBox="1"/>
           <p:nvPr/>
         </p:nvSpPr>
@@ -4286,7 +3722,7 @@
       </p:sp>
       <p:sp>
         <p:nvSpPr>
-          <p:cNvPr id="17" name="사진 자리"/>
+          <p:cNvPr id="8" name="사진 자리"/>
           <p:cNvSpPr/>
           <p:nvPr/>
         </p:nvSpPr>
@@ -4332,7 +3768,7 @@
       </p:sp>
       <p:sp>
         <p:nvSpPr>
-          <p:cNvPr id="18" name="TextBox 17"/>
+          <p:cNvPr id="9" name="TextBox 8"/>
           <p:cNvSpPr txBox="1"/>
           <p:nvPr/>
         </p:nvSpPr>
@@ -4370,7 +3806,7 @@
       </p:sp>
       <p:sp>
         <p:nvSpPr>
-          <p:cNvPr id="19" name="TextBox 18"/>
+          <p:cNvPr id="10" name="TextBox 9"/>
           <p:cNvSpPr txBox="1"/>
           <p:nvPr/>
         </p:nvSpPr>
@@ -4522,267 +3958,6 @@
       </p:sp>
       <p:sp>
         <p:nvSpPr>
-          <p:cNvPr id="5" name="장식"/>
-          <p:cNvSpPr/>
-          <p:nvPr/>
-        </p:nvSpPr>
-        <p:spPr>
-          <a:xfrm>
-            <a:off x="10789920" y="525780"/>
-            <a:ext cx="301752" cy="502920"/>
-          </a:xfrm>
-          <a:prstGeom prst="roundRect">
-            <a:avLst/>
-          </a:prstGeom>
-          <a:solidFill>
-            <a:srgbClr val="8D3443"/>
-          </a:solidFill>
-          <a:ln>
-            <a:noFill/>
-          </a:ln>
-        </p:spPr>
-        <p:txBody>
-          <a:bodyPr rtlCol="0" anchor="ctr"/>
-          <a:lstStyle/>
-          <a:p>
-            <a:pPr algn="ctr"/>
-          </a:p>
-        </p:txBody>
-      </p:sp>
-      <p:sp>
-        <p:nvSpPr>
-          <p:cNvPr id="6" name="장식"/>
-          <p:cNvSpPr/>
-          <p:nvPr/>
-        </p:nvSpPr>
-        <p:spPr>
-          <a:xfrm>
-            <a:off x="10865358" y="475487"/>
-            <a:ext cx="150876" cy="50292"/>
-          </a:xfrm>
-          <a:prstGeom prst="rect">
-            <a:avLst/>
-          </a:prstGeom>
-          <a:solidFill>
-            <a:srgbClr val="3B9158"/>
-          </a:solidFill>
-          <a:ln>
-            <a:noFill/>
-          </a:ln>
-        </p:spPr>
-        <p:txBody>
-          <a:bodyPr rtlCol="0" anchor="ctr"/>
-          <a:lstStyle/>
-          <a:p>
-            <a:pPr algn="ctr"/>
-          </a:p>
-        </p:txBody>
-      </p:sp>
-      <p:sp>
-        <p:nvSpPr>
-          <p:cNvPr id="7" name="장식"/>
-          <p:cNvSpPr/>
-          <p:nvPr/>
-        </p:nvSpPr>
-        <p:spPr>
-          <a:xfrm>
-            <a:off x="10865358" y="1028700"/>
-            <a:ext cx="150876" cy="50292"/>
-          </a:xfrm>
-          <a:prstGeom prst="rect">
-            <a:avLst/>
-          </a:prstGeom>
-          <a:solidFill>
-            <a:srgbClr val="3B9158"/>
-          </a:solidFill>
-          <a:ln>
-            <a:noFill/>
-          </a:ln>
-        </p:spPr>
-        <p:txBody>
-          <a:bodyPr rtlCol="0" anchor="ctr"/>
-          <a:lstStyle/>
-          <a:p>
-            <a:pPr algn="ctr"/>
-          </a:p>
-        </p:txBody>
-      </p:sp>
-      <p:sp>
-        <p:nvSpPr>
-          <p:cNvPr id="8" name="장식"/>
-          <p:cNvSpPr/>
-          <p:nvPr/>
-        </p:nvSpPr>
-        <p:spPr>
-          <a:xfrm>
-            <a:off x="11172139" y="706831"/>
-            <a:ext cx="301752" cy="422452"/>
-          </a:xfrm>
-          <a:prstGeom prst="roundRect">
-            <a:avLst/>
-          </a:prstGeom>
-          <a:solidFill>
-            <a:srgbClr val="F0D1D6"/>
-          </a:solidFill>
-          <a:ln>
-            <a:noFill/>
-          </a:ln>
-        </p:spPr>
-        <p:txBody>
-          <a:bodyPr rtlCol="0" anchor="ctr"/>
-          <a:lstStyle/>
-          <a:p>
-            <a:pPr algn="ctr"/>
-          </a:p>
-        </p:txBody>
-      </p:sp>
-      <p:sp>
-        <p:nvSpPr>
-          <p:cNvPr id="9" name="장식"/>
-          <p:cNvSpPr/>
-          <p:nvPr/>
-        </p:nvSpPr>
-        <p:spPr>
-          <a:xfrm>
-            <a:off x="11247577" y="656539"/>
-            <a:ext cx="150876" cy="50292"/>
-          </a:xfrm>
-          <a:prstGeom prst="rect">
-            <a:avLst/>
-          </a:prstGeom>
-          <a:solidFill>
-            <a:srgbClr val="3B9158"/>
-          </a:solidFill>
-          <a:ln>
-            <a:noFill/>
-          </a:ln>
-        </p:spPr>
-        <p:txBody>
-          <a:bodyPr rtlCol="0" anchor="ctr"/>
-          <a:lstStyle/>
-          <a:p>
-            <a:pPr algn="ctr"/>
-          </a:p>
-        </p:txBody>
-      </p:sp>
-      <p:sp>
-        <p:nvSpPr>
-          <p:cNvPr id="10" name="장식"/>
-          <p:cNvSpPr/>
-          <p:nvPr/>
-        </p:nvSpPr>
-        <p:spPr>
-          <a:xfrm>
-            <a:off x="11247577" y="1129284"/>
-            <a:ext cx="150876" cy="50292"/>
-          </a:xfrm>
-          <a:prstGeom prst="rect">
-            <a:avLst/>
-          </a:prstGeom>
-          <a:solidFill>
-            <a:srgbClr val="3B9158"/>
-          </a:solidFill>
-          <a:ln>
-            <a:noFill/>
-          </a:ln>
-        </p:spPr>
-        <p:txBody>
-          <a:bodyPr rtlCol="0" anchor="ctr"/>
-          <a:lstStyle/>
-          <a:p>
-            <a:pPr algn="ctr"/>
-          </a:p>
-        </p:txBody>
-      </p:sp>
-      <p:sp>
-        <p:nvSpPr>
-          <p:cNvPr id="11" name="장식"/>
-          <p:cNvSpPr/>
-          <p:nvPr/>
-        </p:nvSpPr>
-        <p:spPr>
-          <a:xfrm>
-            <a:off x="11554358" y="525780"/>
-            <a:ext cx="301752" cy="502920"/>
-          </a:xfrm>
-          <a:prstGeom prst="roundRect">
-            <a:avLst/>
-          </a:prstGeom>
-          <a:solidFill>
-            <a:srgbClr val="3B9158"/>
-          </a:solidFill>
-          <a:ln>
-            <a:noFill/>
-          </a:ln>
-        </p:spPr>
-        <p:txBody>
-          <a:bodyPr rtlCol="0" anchor="ctr"/>
-          <a:lstStyle/>
-          <a:p>
-            <a:pPr algn="ctr"/>
-          </a:p>
-        </p:txBody>
-      </p:sp>
-      <p:sp>
-        <p:nvSpPr>
-          <p:cNvPr id="12" name="장식"/>
-          <p:cNvSpPr/>
-          <p:nvPr/>
-        </p:nvSpPr>
-        <p:spPr>
-          <a:xfrm>
-            <a:off x="11629796" y="475487"/>
-            <a:ext cx="150876" cy="50292"/>
-          </a:xfrm>
-          <a:prstGeom prst="rect">
-            <a:avLst/>
-          </a:prstGeom>
-          <a:solidFill>
-            <a:srgbClr val="8D3443"/>
-          </a:solidFill>
-          <a:ln>
-            <a:noFill/>
-          </a:ln>
-        </p:spPr>
-        <p:txBody>
-          <a:bodyPr rtlCol="0" anchor="ctr"/>
-          <a:lstStyle/>
-          <a:p>
-            <a:pPr algn="ctr"/>
-          </a:p>
-        </p:txBody>
-      </p:sp>
-      <p:sp>
-        <p:nvSpPr>
-          <p:cNvPr id="13" name="장식"/>
-          <p:cNvSpPr/>
-          <p:nvPr/>
-        </p:nvSpPr>
-        <p:spPr>
-          <a:xfrm>
-            <a:off x="11629796" y="1028700"/>
-            <a:ext cx="150876" cy="50292"/>
-          </a:xfrm>
-          <a:prstGeom prst="rect">
-            <a:avLst/>
-          </a:prstGeom>
-          <a:solidFill>
-            <a:srgbClr val="8D3443"/>
-          </a:solidFill>
-          <a:ln>
-            <a:noFill/>
-          </a:ln>
-        </p:spPr>
-        <p:txBody>
-          <a:bodyPr rtlCol="0" anchor="ctr"/>
-          <a:lstStyle/>
-          <a:p>
-            <a:pPr algn="ctr"/>
-          </a:p>
-        </p:txBody>
-      </p:sp>
-      <p:sp>
-        <p:nvSpPr>
           <p:cNvPr id="2" name="Title 1"/>
           <p:cNvSpPr>
             <a:spLocks noGrp="1"/>
@@ -4821,7 +3996,7 @@
       </p:sp>
       <p:graphicFrame>
         <p:nvGraphicFramePr>
-          <p:cNvPr id="14" name="표"/>
+          <p:cNvPr id="5" name="표"/>
           <p:cNvGraphicFramePr>
             <a:graphicFrameLocks noGrp="1"/>
           </p:cNvGraphicFramePr>
@@ -5772,267 +4947,6 @@
       </p:sp>
       <p:sp>
         <p:nvSpPr>
-          <p:cNvPr id="5" name="장식"/>
-          <p:cNvSpPr/>
-          <p:nvPr/>
-        </p:nvSpPr>
-        <p:spPr>
-          <a:xfrm>
-            <a:off x="10789920" y="525780"/>
-            <a:ext cx="301752" cy="502920"/>
-          </a:xfrm>
-          <a:prstGeom prst="roundRect">
-            <a:avLst/>
-          </a:prstGeom>
-          <a:solidFill>
-            <a:srgbClr val="8D3443"/>
-          </a:solidFill>
-          <a:ln>
-            <a:noFill/>
-          </a:ln>
-        </p:spPr>
-        <p:txBody>
-          <a:bodyPr rtlCol="0" anchor="ctr"/>
-          <a:lstStyle/>
-          <a:p>
-            <a:pPr algn="ctr"/>
-          </a:p>
-        </p:txBody>
-      </p:sp>
-      <p:sp>
-        <p:nvSpPr>
-          <p:cNvPr id="6" name="장식"/>
-          <p:cNvSpPr/>
-          <p:nvPr/>
-        </p:nvSpPr>
-        <p:spPr>
-          <a:xfrm>
-            <a:off x="10865358" y="475487"/>
-            <a:ext cx="150876" cy="50292"/>
-          </a:xfrm>
-          <a:prstGeom prst="rect">
-            <a:avLst/>
-          </a:prstGeom>
-          <a:solidFill>
-            <a:srgbClr val="3B9158"/>
-          </a:solidFill>
-          <a:ln>
-            <a:noFill/>
-          </a:ln>
-        </p:spPr>
-        <p:txBody>
-          <a:bodyPr rtlCol="0" anchor="ctr"/>
-          <a:lstStyle/>
-          <a:p>
-            <a:pPr algn="ctr"/>
-          </a:p>
-        </p:txBody>
-      </p:sp>
-      <p:sp>
-        <p:nvSpPr>
-          <p:cNvPr id="7" name="장식"/>
-          <p:cNvSpPr/>
-          <p:nvPr/>
-        </p:nvSpPr>
-        <p:spPr>
-          <a:xfrm>
-            <a:off x="10865358" y="1028700"/>
-            <a:ext cx="150876" cy="50292"/>
-          </a:xfrm>
-          <a:prstGeom prst="rect">
-            <a:avLst/>
-          </a:prstGeom>
-          <a:solidFill>
-            <a:srgbClr val="3B9158"/>
-          </a:solidFill>
-          <a:ln>
-            <a:noFill/>
-          </a:ln>
-        </p:spPr>
-        <p:txBody>
-          <a:bodyPr rtlCol="0" anchor="ctr"/>
-          <a:lstStyle/>
-          <a:p>
-            <a:pPr algn="ctr"/>
-          </a:p>
-        </p:txBody>
-      </p:sp>
-      <p:sp>
-        <p:nvSpPr>
-          <p:cNvPr id="8" name="장식"/>
-          <p:cNvSpPr/>
-          <p:nvPr/>
-        </p:nvSpPr>
-        <p:spPr>
-          <a:xfrm>
-            <a:off x="11172139" y="706831"/>
-            <a:ext cx="301752" cy="422452"/>
-          </a:xfrm>
-          <a:prstGeom prst="roundRect">
-            <a:avLst/>
-          </a:prstGeom>
-          <a:solidFill>
-            <a:srgbClr val="F0D1D6"/>
-          </a:solidFill>
-          <a:ln>
-            <a:noFill/>
-          </a:ln>
-        </p:spPr>
-        <p:txBody>
-          <a:bodyPr rtlCol="0" anchor="ctr"/>
-          <a:lstStyle/>
-          <a:p>
-            <a:pPr algn="ctr"/>
-          </a:p>
-        </p:txBody>
-      </p:sp>
-      <p:sp>
-        <p:nvSpPr>
-          <p:cNvPr id="9" name="장식"/>
-          <p:cNvSpPr/>
-          <p:nvPr/>
-        </p:nvSpPr>
-        <p:spPr>
-          <a:xfrm>
-            <a:off x="11247577" y="656539"/>
-            <a:ext cx="150876" cy="50292"/>
-          </a:xfrm>
-          <a:prstGeom prst="rect">
-            <a:avLst/>
-          </a:prstGeom>
-          <a:solidFill>
-            <a:srgbClr val="3B9158"/>
-          </a:solidFill>
-          <a:ln>
-            <a:noFill/>
-          </a:ln>
-        </p:spPr>
-        <p:txBody>
-          <a:bodyPr rtlCol="0" anchor="ctr"/>
-          <a:lstStyle/>
-          <a:p>
-            <a:pPr algn="ctr"/>
-          </a:p>
-        </p:txBody>
-      </p:sp>
-      <p:sp>
-        <p:nvSpPr>
-          <p:cNvPr id="10" name="장식"/>
-          <p:cNvSpPr/>
-          <p:nvPr/>
-        </p:nvSpPr>
-        <p:spPr>
-          <a:xfrm>
-            <a:off x="11247577" y="1129284"/>
-            <a:ext cx="150876" cy="50292"/>
-          </a:xfrm>
-          <a:prstGeom prst="rect">
-            <a:avLst/>
-          </a:prstGeom>
-          <a:solidFill>
-            <a:srgbClr val="3B9158"/>
-          </a:solidFill>
-          <a:ln>
-            <a:noFill/>
-          </a:ln>
-        </p:spPr>
-        <p:txBody>
-          <a:bodyPr rtlCol="0" anchor="ctr"/>
-          <a:lstStyle/>
-          <a:p>
-            <a:pPr algn="ctr"/>
-          </a:p>
-        </p:txBody>
-      </p:sp>
-      <p:sp>
-        <p:nvSpPr>
-          <p:cNvPr id="11" name="장식"/>
-          <p:cNvSpPr/>
-          <p:nvPr/>
-        </p:nvSpPr>
-        <p:spPr>
-          <a:xfrm>
-            <a:off x="11554358" y="525780"/>
-            <a:ext cx="301752" cy="502920"/>
-          </a:xfrm>
-          <a:prstGeom prst="roundRect">
-            <a:avLst/>
-          </a:prstGeom>
-          <a:solidFill>
-            <a:srgbClr val="3B9158"/>
-          </a:solidFill>
-          <a:ln>
-            <a:noFill/>
-          </a:ln>
-        </p:spPr>
-        <p:txBody>
-          <a:bodyPr rtlCol="0" anchor="ctr"/>
-          <a:lstStyle/>
-          <a:p>
-            <a:pPr algn="ctr"/>
-          </a:p>
-        </p:txBody>
-      </p:sp>
-      <p:sp>
-        <p:nvSpPr>
-          <p:cNvPr id="12" name="장식"/>
-          <p:cNvSpPr/>
-          <p:nvPr/>
-        </p:nvSpPr>
-        <p:spPr>
-          <a:xfrm>
-            <a:off x="11629796" y="475487"/>
-            <a:ext cx="150876" cy="50292"/>
-          </a:xfrm>
-          <a:prstGeom prst="rect">
-            <a:avLst/>
-          </a:prstGeom>
-          <a:solidFill>
-            <a:srgbClr val="8D3443"/>
-          </a:solidFill>
-          <a:ln>
-            <a:noFill/>
-          </a:ln>
-        </p:spPr>
-        <p:txBody>
-          <a:bodyPr rtlCol="0" anchor="ctr"/>
-          <a:lstStyle/>
-          <a:p>
-            <a:pPr algn="ctr"/>
-          </a:p>
-        </p:txBody>
-      </p:sp>
-      <p:sp>
-        <p:nvSpPr>
-          <p:cNvPr id="13" name="장식"/>
-          <p:cNvSpPr/>
-          <p:nvPr/>
-        </p:nvSpPr>
-        <p:spPr>
-          <a:xfrm>
-            <a:off x="11629796" y="1028700"/>
-            <a:ext cx="150876" cy="50292"/>
-          </a:xfrm>
-          <a:prstGeom prst="rect">
-            <a:avLst/>
-          </a:prstGeom>
-          <a:solidFill>
-            <a:srgbClr val="8D3443"/>
-          </a:solidFill>
-          <a:ln>
-            <a:noFill/>
-          </a:ln>
-        </p:spPr>
-        <p:txBody>
-          <a:bodyPr rtlCol="0" anchor="ctr"/>
-          <a:lstStyle/>
-          <a:p>
-            <a:pPr algn="ctr"/>
-          </a:p>
-        </p:txBody>
-      </p:sp>
-      <p:sp>
-        <p:nvSpPr>
           <p:cNvPr id="2" name="Title 1"/>
           <p:cNvSpPr>
             <a:spLocks noGrp="1"/>
@@ -6071,7 +4985,7 @@
       </p:sp>
       <p:sp>
         <p:nvSpPr>
-          <p:cNvPr id="14" name="카드 1"/>
+          <p:cNvPr id="5" name="카드 1"/>
           <p:cNvSpPr/>
           <p:nvPr/>
         </p:nvSpPr>
@@ -6104,7 +5018,7 @@
       </p:sp>
       <p:sp>
         <p:nvSpPr>
-          <p:cNvPr id="15" name="번호 1"/>
+          <p:cNvPr id="6" name="번호 1"/>
           <p:cNvSpPr/>
           <p:nvPr/>
         </p:nvSpPr>
@@ -6147,7 +5061,7 @@
       </p:sp>
       <p:sp>
         <p:nvSpPr>
-          <p:cNvPr id="16" name="TextBox 15"/>
+          <p:cNvPr id="7" name="TextBox 6"/>
           <p:cNvSpPr txBox="1"/>
           <p:nvPr/>
         </p:nvSpPr>
@@ -6185,7 +5099,7 @@
       </p:sp>
       <p:sp>
         <p:nvSpPr>
-          <p:cNvPr id="17" name="TextBox 16"/>
+          <p:cNvPr id="8" name="TextBox 7"/>
           <p:cNvSpPr txBox="1"/>
           <p:nvPr/>
         </p:nvSpPr>
@@ -6223,7 +5137,7 @@
       </p:sp>
       <p:sp>
         <p:nvSpPr>
-          <p:cNvPr id="18" name="카드 2"/>
+          <p:cNvPr id="9" name="카드 2"/>
           <p:cNvSpPr/>
           <p:nvPr/>
         </p:nvSpPr>
@@ -6256,7 +5170,7 @@
       </p:sp>
       <p:sp>
         <p:nvSpPr>
-          <p:cNvPr id="19" name="번호 2"/>
+          <p:cNvPr id="10" name="번호 2"/>
           <p:cNvSpPr/>
           <p:nvPr/>
         </p:nvSpPr>
@@ -6299,7 +5213,7 @@
       </p:sp>
       <p:sp>
         <p:nvSpPr>
-          <p:cNvPr id="20" name="TextBox 19"/>
+          <p:cNvPr id="11" name="TextBox 10"/>
           <p:cNvSpPr txBox="1"/>
           <p:nvPr/>
         </p:nvSpPr>
@@ -6337,7 +5251,7 @@
       </p:sp>
       <p:sp>
         <p:nvSpPr>
-          <p:cNvPr id="21" name="TextBox 20"/>
+          <p:cNvPr id="12" name="TextBox 11"/>
           <p:cNvSpPr txBox="1"/>
           <p:nvPr/>
         </p:nvSpPr>
@@ -6375,7 +5289,7 @@
       </p:sp>
       <p:sp>
         <p:nvSpPr>
-          <p:cNvPr id="22" name="카드 3"/>
+          <p:cNvPr id="13" name="카드 3"/>
           <p:cNvSpPr/>
           <p:nvPr/>
         </p:nvSpPr>
@@ -6408,7 +5322,7 @@
       </p:sp>
       <p:sp>
         <p:nvSpPr>
-          <p:cNvPr id="23" name="번호 3"/>
+          <p:cNvPr id="14" name="번호 3"/>
           <p:cNvSpPr/>
           <p:nvPr/>
         </p:nvSpPr>
@@ -6451,7 +5365,7 @@
       </p:sp>
       <p:sp>
         <p:nvSpPr>
-          <p:cNvPr id="24" name="TextBox 23"/>
+          <p:cNvPr id="15" name="TextBox 14"/>
           <p:cNvSpPr txBox="1"/>
           <p:nvPr/>
         </p:nvSpPr>
@@ -6489,7 +5403,7 @@
       </p:sp>
       <p:sp>
         <p:nvSpPr>
-          <p:cNvPr id="25" name="TextBox 24"/>
+          <p:cNvPr id="16" name="TextBox 15"/>
           <p:cNvSpPr txBox="1"/>
           <p:nvPr/>
         </p:nvSpPr>
@@ -6611,267 +5525,6 @@
       </p:sp>
       <p:sp>
         <p:nvSpPr>
-          <p:cNvPr id="5" name="장식"/>
-          <p:cNvSpPr/>
-          <p:nvPr/>
-        </p:nvSpPr>
-        <p:spPr>
-          <a:xfrm>
-            <a:off x="10789920" y="525780"/>
-            <a:ext cx="301752" cy="502920"/>
-          </a:xfrm>
-          <a:prstGeom prst="roundRect">
-            <a:avLst/>
-          </a:prstGeom>
-          <a:solidFill>
-            <a:srgbClr val="8D3443"/>
-          </a:solidFill>
-          <a:ln>
-            <a:noFill/>
-          </a:ln>
-        </p:spPr>
-        <p:txBody>
-          <a:bodyPr rtlCol="0" anchor="ctr"/>
-          <a:lstStyle/>
-          <a:p>
-            <a:pPr algn="ctr"/>
-          </a:p>
-        </p:txBody>
-      </p:sp>
-      <p:sp>
-        <p:nvSpPr>
-          <p:cNvPr id="6" name="장식"/>
-          <p:cNvSpPr/>
-          <p:nvPr/>
-        </p:nvSpPr>
-        <p:spPr>
-          <a:xfrm>
-            <a:off x="10865358" y="475487"/>
-            <a:ext cx="150876" cy="50292"/>
-          </a:xfrm>
-          <a:prstGeom prst="rect">
-            <a:avLst/>
-          </a:prstGeom>
-          <a:solidFill>
-            <a:srgbClr val="3B9158"/>
-          </a:solidFill>
-          <a:ln>
-            <a:noFill/>
-          </a:ln>
-        </p:spPr>
-        <p:txBody>
-          <a:bodyPr rtlCol="0" anchor="ctr"/>
-          <a:lstStyle/>
-          <a:p>
-            <a:pPr algn="ctr"/>
-          </a:p>
-        </p:txBody>
-      </p:sp>
-      <p:sp>
-        <p:nvSpPr>
-          <p:cNvPr id="7" name="장식"/>
-          <p:cNvSpPr/>
-          <p:nvPr/>
-        </p:nvSpPr>
-        <p:spPr>
-          <a:xfrm>
-            <a:off x="10865358" y="1028700"/>
-            <a:ext cx="150876" cy="50292"/>
-          </a:xfrm>
-          <a:prstGeom prst="rect">
-            <a:avLst/>
-          </a:prstGeom>
-          <a:solidFill>
-            <a:srgbClr val="3B9158"/>
-          </a:solidFill>
-          <a:ln>
-            <a:noFill/>
-          </a:ln>
-        </p:spPr>
-        <p:txBody>
-          <a:bodyPr rtlCol="0" anchor="ctr"/>
-          <a:lstStyle/>
-          <a:p>
-            <a:pPr algn="ctr"/>
-          </a:p>
-        </p:txBody>
-      </p:sp>
-      <p:sp>
-        <p:nvSpPr>
-          <p:cNvPr id="8" name="장식"/>
-          <p:cNvSpPr/>
-          <p:nvPr/>
-        </p:nvSpPr>
-        <p:spPr>
-          <a:xfrm>
-            <a:off x="11172139" y="706831"/>
-            <a:ext cx="301752" cy="422452"/>
-          </a:xfrm>
-          <a:prstGeom prst="roundRect">
-            <a:avLst/>
-          </a:prstGeom>
-          <a:solidFill>
-            <a:srgbClr val="F0D1D6"/>
-          </a:solidFill>
-          <a:ln>
-            <a:noFill/>
-          </a:ln>
-        </p:spPr>
-        <p:txBody>
-          <a:bodyPr rtlCol="0" anchor="ctr"/>
-          <a:lstStyle/>
-          <a:p>
-            <a:pPr algn="ctr"/>
-          </a:p>
-        </p:txBody>
-      </p:sp>
-      <p:sp>
-        <p:nvSpPr>
-          <p:cNvPr id="9" name="장식"/>
-          <p:cNvSpPr/>
-          <p:nvPr/>
-        </p:nvSpPr>
-        <p:spPr>
-          <a:xfrm>
-            <a:off x="11247577" y="656539"/>
-            <a:ext cx="150876" cy="50292"/>
-          </a:xfrm>
-          <a:prstGeom prst="rect">
-            <a:avLst/>
-          </a:prstGeom>
-          <a:solidFill>
-            <a:srgbClr val="3B9158"/>
-          </a:solidFill>
-          <a:ln>
-            <a:noFill/>
-          </a:ln>
-        </p:spPr>
-        <p:txBody>
-          <a:bodyPr rtlCol="0" anchor="ctr"/>
-          <a:lstStyle/>
-          <a:p>
-            <a:pPr algn="ctr"/>
-          </a:p>
-        </p:txBody>
-      </p:sp>
-      <p:sp>
-        <p:nvSpPr>
-          <p:cNvPr id="10" name="장식"/>
-          <p:cNvSpPr/>
-          <p:nvPr/>
-        </p:nvSpPr>
-        <p:spPr>
-          <a:xfrm>
-            <a:off x="11247577" y="1129284"/>
-            <a:ext cx="150876" cy="50292"/>
-          </a:xfrm>
-          <a:prstGeom prst="rect">
-            <a:avLst/>
-          </a:prstGeom>
-          <a:solidFill>
-            <a:srgbClr val="3B9158"/>
-          </a:solidFill>
-          <a:ln>
-            <a:noFill/>
-          </a:ln>
-        </p:spPr>
-        <p:txBody>
-          <a:bodyPr rtlCol="0" anchor="ctr"/>
-          <a:lstStyle/>
-          <a:p>
-            <a:pPr algn="ctr"/>
-          </a:p>
-        </p:txBody>
-      </p:sp>
-      <p:sp>
-        <p:nvSpPr>
-          <p:cNvPr id="11" name="장식"/>
-          <p:cNvSpPr/>
-          <p:nvPr/>
-        </p:nvSpPr>
-        <p:spPr>
-          <a:xfrm>
-            <a:off x="11554358" y="525780"/>
-            <a:ext cx="301752" cy="502920"/>
-          </a:xfrm>
-          <a:prstGeom prst="roundRect">
-            <a:avLst/>
-          </a:prstGeom>
-          <a:solidFill>
-            <a:srgbClr val="3B9158"/>
-          </a:solidFill>
-          <a:ln>
-            <a:noFill/>
-          </a:ln>
-        </p:spPr>
-        <p:txBody>
-          <a:bodyPr rtlCol="0" anchor="ctr"/>
-          <a:lstStyle/>
-          <a:p>
-            <a:pPr algn="ctr"/>
-          </a:p>
-        </p:txBody>
-      </p:sp>
-      <p:sp>
-        <p:nvSpPr>
-          <p:cNvPr id="12" name="장식"/>
-          <p:cNvSpPr/>
-          <p:nvPr/>
-        </p:nvSpPr>
-        <p:spPr>
-          <a:xfrm>
-            <a:off x="11629796" y="475487"/>
-            <a:ext cx="150876" cy="50292"/>
-          </a:xfrm>
-          <a:prstGeom prst="rect">
-            <a:avLst/>
-          </a:prstGeom>
-          <a:solidFill>
-            <a:srgbClr val="8D3443"/>
-          </a:solidFill>
-          <a:ln>
-            <a:noFill/>
-          </a:ln>
-        </p:spPr>
-        <p:txBody>
-          <a:bodyPr rtlCol="0" anchor="ctr"/>
-          <a:lstStyle/>
-          <a:p>
-            <a:pPr algn="ctr"/>
-          </a:p>
-        </p:txBody>
-      </p:sp>
-      <p:sp>
-        <p:nvSpPr>
-          <p:cNvPr id="13" name="장식"/>
-          <p:cNvSpPr/>
-          <p:nvPr/>
-        </p:nvSpPr>
-        <p:spPr>
-          <a:xfrm>
-            <a:off x="11629796" y="1028700"/>
-            <a:ext cx="150876" cy="50292"/>
-          </a:xfrm>
-          <a:prstGeom prst="rect">
-            <a:avLst/>
-          </a:prstGeom>
-          <a:solidFill>
-            <a:srgbClr val="8D3443"/>
-          </a:solidFill>
-          <a:ln>
-            <a:noFill/>
-          </a:ln>
-        </p:spPr>
-        <p:txBody>
-          <a:bodyPr rtlCol="0" anchor="ctr"/>
-          <a:lstStyle/>
-          <a:p>
-            <a:pPr algn="ctr"/>
-          </a:p>
-        </p:txBody>
-      </p:sp>
-      <p:sp>
-        <p:nvSpPr>
           <p:cNvPr id="2" name="Title 1"/>
           <p:cNvSpPr>
             <a:spLocks noGrp="1"/>
@@ -6910,7 +5563,7 @@
       </p:sp>
       <p:sp>
         <p:nvSpPr>
-          <p:cNvPr id="14" name="사진 자리"/>
+          <p:cNvPr id="5" name="사진 자리"/>
           <p:cNvSpPr/>
           <p:nvPr/>
         </p:nvSpPr>
@@ -6958,7 +5611,7 @@
       </p:sp>
       <p:sp>
         <p:nvSpPr>
-          <p:cNvPr id="15" name="사진 자리"/>
+          <p:cNvPr id="6" name="사진 자리"/>
           <p:cNvSpPr/>
           <p:nvPr/>
         </p:nvSpPr>
@@ -7006,7 +5659,7 @@
       </p:sp>
       <p:sp>
         <p:nvSpPr>
-          <p:cNvPr id="16" name="사진 자리"/>
+          <p:cNvPr id="7" name="사진 자리"/>
           <p:cNvSpPr/>
           <p:nvPr/>
         </p:nvSpPr>
@@ -7054,7 +5707,7 @@
       </p:sp>
       <p:sp>
         <p:nvSpPr>
-          <p:cNvPr id="17" name="사진 자리"/>
+          <p:cNvPr id="8" name="사진 자리"/>
           <p:cNvSpPr/>
           <p:nvPr/>
         </p:nvSpPr>
@@ -7102,7 +5755,7 @@
       </p:sp>
       <p:sp>
         <p:nvSpPr>
-          <p:cNvPr id="18" name="사진 자리"/>
+          <p:cNvPr id="9" name="사진 자리"/>
           <p:cNvSpPr/>
           <p:nvPr/>
         </p:nvSpPr>
@@ -7150,7 +5803,7 @@
       </p:sp>
       <p:sp>
         <p:nvSpPr>
-          <p:cNvPr id="19" name="사진 자리"/>
+          <p:cNvPr id="10" name="사진 자리"/>
           <p:cNvSpPr/>
           <p:nvPr/>
         </p:nvSpPr>
@@ -7207,14 +5860,6 @@
 <file path=ppt/slides/slide6.xml><?xml version="1.0" encoding="utf-8"?>
 <p:sld xmlns:a="http://schemas.openxmlformats.org/drawingml/2006/main" xmlns:p="http://schemas.openxmlformats.org/presentationml/2006/main" xmlns:r="http://schemas.openxmlformats.org/officeDocument/2006/relationships">
   <p:cSld>
-    <p:bg>
-      <p:bgPr>
-        <a:solidFill>
-          <a:srgbClr val="FFFFFF"/>
-        </a:solidFill>
-        <a:effectLst/>
-      </p:bgPr>
-    </p:bg>
     <p:spTree>
       <p:nvGrpSpPr>
         <p:cNvPr id="1" name=""/>
@@ -7222,325 +5867,30 @@
         <p:nvPr/>
       </p:nvGrpSpPr>
       <p:grpSpPr/>
-      <p:sp>
-        <p:nvSpPr>
-          <p:cNvPr id="3" name="장식"/>
-          <p:cNvSpPr/>
+      <p:pic>
+        <p:nvPicPr>
+          <p:cNvPr id="3" name="표지 그림" descr="wedding-43.jpg"/>
+          <p:cNvPicPr>
+            <a:picLocks noChangeAspect="1"/>
+          </p:cNvPicPr>
           <p:nvPr/>
-        </p:nvSpPr>
-        <p:spPr>
-          <a:xfrm>
-            <a:off x="-274320" y="4251960"/>
-            <a:ext cx="12740335" cy="2743200"/>
-          </a:xfrm>
-          <a:prstGeom prst="wave">
-            <a:avLst/>
-          </a:prstGeom>
-          <a:solidFill>
-            <a:srgbClr val="F0D1D6"/>
-          </a:solidFill>
-          <a:ln>
-            <a:noFill/>
-          </a:ln>
-        </p:spPr>
-        <p:txBody>
-          <a:bodyPr rtlCol="0" anchor="ctr"/>
-          <a:lstStyle/>
-          <a:p>
-            <a:pPr algn="ctr"/>
-          </a:p>
-        </p:txBody>
-      </p:sp>
-      <p:sp>
-        <p:nvSpPr>
-          <p:cNvPr id="4" name="장식"/>
-          <p:cNvSpPr/>
-          <p:nvPr/>
-        </p:nvSpPr>
-        <p:spPr>
-          <a:xfrm>
-            <a:off x="-274320" y="5074920"/>
-            <a:ext cx="12740335" cy="2331720"/>
-          </a:xfrm>
-          <a:prstGeom prst="wave">
-            <a:avLst/>
-          </a:prstGeom>
-          <a:solidFill>
-            <a:srgbClr val="8D3443"/>
-          </a:solidFill>
-          <a:ln>
-            <a:noFill/>
-          </a:ln>
-        </p:spPr>
-        <p:txBody>
-          <a:bodyPr rtlCol="0" anchor="ctr"/>
-          <a:lstStyle/>
-          <a:p>
-            <a:pPr algn="ctr"/>
-          </a:p>
-        </p:txBody>
-      </p:sp>
-      <p:sp>
-        <p:nvSpPr>
-          <p:cNvPr id="5" name="장식"/>
-          <p:cNvSpPr/>
-          <p:nvPr/>
-        </p:nvSpPr>
-        <p:spPr>
-          <a:xfrm>
-            <a:off x="8543294" y="1234440"/>
-            <a:ext cx="822959" cy="1371600"/>
-          </a:xfrm>
-          <a:prstGeom prst="roundRect">
-            <a:avLst/>
-          </a:prstGeom>
-          <a:solidFill>
-            <a:srgbClr val="8D3443"/>
-          </a:solidFill>
-          <a:ln>
-            <a:noFill/>
-          </a:ln>
-        </p:spPr>
-        <p:txBody>
-          <a:bodyPr rtlCol="0" anchor="ctr"/>
-          <a:lstStyle/>
-          <a:p>
-            <a:pPr algn="ctr"/>
-          </a:p>
-        </p:txBody>
-      </p:sp>
-      <p:sp>
-        <p:nvSpPr>
-          <p:cNvPr id="6" name="장식"/>
-          <p:cNvSpPr/>
-          <p:nvPr/>
-        </p:nvSpPr>
-        <p:spPr>
-          <a:xfrm>
-            <a:off x="8749034" y="1097280"/>
-            <a:ext cx="411479" cy="137160"/>
+        </p:nvPicPr>
+        <p:blipFill>
+          <a:blip r:embed="rId2"/>
+          <a:stretch>
+            <a:fillRect/>
+          </a:stretch>
+        </p:blipFill>
+        <p:spPr>
+          <a:xfrm>
+            <a:off x="0" y="0"/>
+            <a:ext cx="12191695" cy="6858000"/>
           </a:xfrm>
           <a:prstGeom prst="rect">
             <a:avLst/>
           </a:prstGeom>
-          <a:solidFill>
-            <a:srgbClr val="3B9158"/>
-          </a:solidFill>
-          <a:ln>
-            <a:noFill/>
-          </a:ln>
-        </p:spPr>
-        <p:txBody>
-          <a:bodyPr rtlCol="0" anchor="ctr"/>
-          <a:lstStyle/>
-          <a:p>
-            <a:pPr algn="ctr"/>
-          </a:p>
-        </p:txBody>
-      </p:sp>
-      <p:sp>
-        <p:nvSpPr>
-          <p:cNvPr id="7" name="장식"/>
-          <p:cNvSpPr/>
-          <p:nvPr/>
-        </p:nvSpPr>
-        <p:spPr>
-          <a:xfrm>
-            <a:off x="8749034" y="2606040"/>
-            <a:ext cx="411479" cy="137160"/>
-          </a:xfrm>
-          <a:prstGeom prst="rect">
-            <a:avLst/>
-          </a:prstGeom>
-          <a:solidFill>
-            <a:srgbClr val="3B9158"/>
-          </a:solidFill>
-          <a:ln>
-            <a:noFill/>
-          </a:ln>
-        </p:spPr>
-        <p:txBody>
-          <a:bodyPr rtlCol="0" anchor="ctr"/>
-          <a:lstStyle/>
-          <a:p>
-            <a:pPr algn="ctr"/>
-          </a:p>
-        </p:txBody>
-      </p:sp>
-      <p:sp>
-        <p:nvSpPr>
-          <p:cNvPr id="8" name="장식"/>
-          <p:cNvSpPr/>
-          <p:nvPr/>
-        </p:nvSpPr>
-        <p:spPr>
-          <a:xfrm>
-            <a:off x="9585710" y="1728216"/>
-            <a:ext cx="822959" cy="1152144"/>
-          </a:xfrm>
-          <a:prstGeom prst="roundRect">
-            <a:avLst/>
-          </a:prstGeom>
-          <a:solidFill>
-            <a:srgbClr val="F0D1D6"/>
-          </a:solidFill>
-          <a:ln>
-            <a:noFill/>
-          </a:ln>
-        </p:spPr>
-        <p:txBody>
-          <a:bodyPr rtlCol="0" anchor="ctr"/>
-          <a:lstStyle/>
-          <a:p>
-            <a:pPr algn="ctr"/>
-          </a:p>
-        </p:txBody>
-      </p:sp>
-      <p:sp>
-        <p:nvSpPr>
-          <p:cNvPr id="9" name="장식"/>
-          <p:cNvSpPr/>
-          <p:nvPr/>
-        </p:nvSpPr>
-        <p:spPr>
-          <a:xfrm>
-            <a:off x="9791450" y="1591056"/>
-            <a:ext cx="411479" cy="137160"/>
-          </a:xfrm>
-          <a:prstGeom prst="rect">
-            <a:avLst/>
-          </a:prstGeom>
-          <a:solidFill>
-            <a:srgbClr val="3B9158"/>
-          </a:solidFill>
-          <a:ln>
-            <a:noFill/>
-          </a:ln>
-        </p:spPr>
-        <p:txBody>
-          <a:bodyPr rtlCol="0" anchor="ctr"/>
-          <a:lstStyle/>
-          <a:p>
-            <a:pPr algn="ctr"/>
-          </a:p>
-        </p:txBody>
-      </p:sp>
-      <p:sp>
-        <p:nvSpPr>
-          <p:cNvPr id="10" name="장식"/>
-          <p:cNvSpPr/>
-          <p:nvPr/>
-        </p:nvSpPr>
-        <p:spPr>
-          <a:xfrm>
-            <a:off x="9791450" y="2880360"/>
-            <a:ext cx="411479" cy="137160"/>
-          </a:xfrm>
-          <a:prstGeom prst="rect">
-            <a:avLst/>
-          </a:prstGeom>
-          <a:solidFill>
-            <a:srgbClr val="3B9158"/>
-          </a:solidFill>
-          <a:ln>
-            <a:noFill/>
-          </a:ln>
-        </p:spPr>
-        <p:txBody>
-          <a:bodyPr rtlCol="0" anchor="ctr"/>
-          <a:lstStyle/>
-          <a:p>
-            <a:pPr algn="ctr"/>
-          </a:p>
-        </p:txBody>
-      </p:sp>
-      <p:sp>
-        <p:nvSpPr>
-          <p:cNvPr id="11" name="장식"/>
-          <p:cNvSpPr/>
-          <p:nvPr/>
-        </p:nvSpPr>
-        <p:spPr>
-          <a:xfrm>
-            <a:off x="10628126" y="1234440"/>
-            <a:ext cx="822959" cy="1371600"/>
-          </a:xfrm>
-          <a:prstGeom prst="roundRect">
-            <a:avLst/>
-          </a:prstGeom>
-          <a:solidFill>
-            <a:srgbClr val="3B9158"/>
-          </a:solidFill>
-          <a:ln>
-            <a:noFill/>
-          </a:ln>
-        </p:spPr>
-        <p:txBody>
-          <a:bodyPr rtlCol="0" anchor="ctr"/>
-          <a:lstStyle/>
-          <a:p>
-            <a:pPr algn="ctr"/>
-          </a:p>
-        </p:txBody>
-      </p:sp>
-      <p:sp>
-        <p:nvSpPr>
-          <p:cNvPr id="12" name="장식"/>
-          <p:cNvSpPr/>
-          <p:nvPr/>
-        </p:nvSpPr>
-        <p:spPr>
-          <a:xfrm>
-            <a:off x="10833866" y="1097280"/>
-            <a:ext cx="411479" cy="137160"/>
-          </a:xfrm>
-          <a:prstGeom prst="rect">
-            <a:avLst/>
-          </a:prstGeom>
-          <a:solidFill>
-            <a:srgbClr val="8D3443"/>
-          </a:solidFill>
-          <a:ln>
-            <a:noFill/>
-          </a:ln>
-        </p:spPr>
-        <p:txBody>
-          <a:bodyPr rtlCol="0" anchor="ctr"/>
-          <a:lstStyle/>
-          <a:p>
-            <a:pPr algn="ctr"/>
-          </a:p>
-        </p:txBody>
-      </p:sp>
-      <p:sp>
-        <p:nvSpPr>
-          <p:cNvPr id="13" name="장식"/>
-          <p:cNvSpPr/>
-          <p:nvPr/>
-        </p:nvSpPr>
-        <p:spPr>
-          <a:xfrm>
-            <a:off x="10833866" y="2606040"/>
-            <a:ext cx="411479" cy="137160"/>
-          </a:xfrm>
-          <a:prstGeom prst="rect">
-            <a:avLst/>
-          </a:prstGeom>
-          <a:solidFill>
-            <a:srgbClr val="8D3443"/>
-          </a:solidFill>
-          <a:ln>
-            <a:noFill/>
-          </a:ln>
-        </p:spPr>
-        <p:txBody>
-          <a:bodyPr rtlCol="0" anchor="ctr"/>
-          <a:lstStyle/>
-          <a:p>
-            <a:pPr algn="ctr"/>
-          </a:p>
-        </p:txBody>
-      </p:sp>
+        </p:spPr>
+      </p:pic>
       <p:sp>
         <p:nvSpPr>
           <p:cNvPr id="2" name="Title 1"/>
@@ -7553,8 +5903,8 @@
         </p:nvSpPr>
         <p:spPr>
           <a:xfrm>
-            <a:off x="975335" y="1371600"/>
-            <a:ext cx="7558851" cy="1463040"/>
+            <a:off x="853418" y="2057400"/>
+            <a:ext cx="6095847" cy="1554480"/>
           </a:xfrm>
         </p:spPr>
         <p:txBody>
@@ -7574,21 +5924,21 @@
                   <a:srgbClr val="431920"/>
                 </a:solidFill>
               </a:rPr>
-              <a:t>함께해 주셔서 감사합니다</a:t>
-            </a:r>
-          </a:p>
-        </p:txBody>
-      </p:sp>
-      <p:sp>
-        <p:nvSpPr>
-          <p:cNvPr id="14" name="한 줄 문구"/>
+              <a:t>와 주셔서 고맙습니다</a:t>
+            </a:r>
+          </a:p>
+        </p:txBody>
+      </p:sp>
+      <p:sp>
+        <p:nvSpPr>
+          <p:cNvPr id="4" name="한 줄 문구"/>
           <p:cNvSpPr txBox="1"/>
           <p:nvPr/>
         </p:nvSpPr>
         <p:spPr>
           <a:xfrm>
-            <a:off x="975335" y="2926080"/>
-            <a:ext cx="7315017" cy="822960"/>
+            <a:off x="853418" y="3749039"/>
+            <a:ext cx="6095847" cy="822960"/>
           </a:xfrm>
           <a:prstGeom prst="rect">
             <a:avLst/>
@@ -7612,21 +5962,21 @@
                   <a:srgbClr val="431920"/>
                 </a:solidFill>
               </a:rPr>
-              <a:t>오늘의 축복을 오래도록 간직하겠습니다</a:t>
-            </a:r>
-          </a:p>
-        </p:txBody>
-      </p:sp>
-      <p:sp>
-        <p:nvSpPr>
-          <p:cNvPr id="15" name="안내 문구"/>
+              <a:t>잘 살겠습니다</a:t>
+            </a:r>
+          </a:p>
+        </p:txBody>
+      </p:sp>
+      <p:sp>
+        <p:nvSpPr>
+          <p:cNvPr id="5" name="안내 문구"/>
           <p:cNvSpPr txBox="1"/>
           <p:nvPr/>
         </p:nvSpPr>
         <p:spPr>
           <a:xfrm>
-            <a:off x="975335" y="3794760"/>
-            <a:ext cx="7315017" cy="914400"/>
+            <a:off x="853418" y="4617720"/>
+            <a:ext cx="6095847" cy="914400"/>
           </a:xfrm>
           <a:prstGeom prst="rect">
             <a:avLst/>

--- a/public/fun/pack/pptx/wedding/결혼식_43_식순중심_설날세배.pptx
+++ b/public/fun/pack/pptx/wedding/결혼식_43_식순중심_설날세배.pptx
@@ -3286,6 +3286,14 @@
 <file path=ppt/slides/slide1.xml><?xml version="1.0" encoding="utf-8"?>
 <p:sld xmlns:a="http://schemas.openxmlformats.org/drawingml/2006/main" xmlns:p="http://schemas.openxmlformats.org/presentationml/2006/main" xmlns:r="http://schemas.openxmlformats.org/officeDocument/2006/relationships">
   <p:cSld>
+    <p:bg>
+      <p:bgPr>
+        <a:solidFill>
+          <a:srgbClr val="F6D5DA"/>
+        </a:solidFill>
+        <a:effectLst/>
+      </p:bgPr>
+    </p:bg>
     <p:spTree>
       <p:nvGrpSpPr>
         <p:cNvPr id="1" name=""/>
@@ -3293,30 +3301,120 @@
         <p:nvPr/>
       </p:nvGrpSpPr>
       <p:grpSpPr/>
-      <p:pic>
-        <p:nvPicPr>
-          <p:cNvPr id="3" name="표지 그림" descr="wedding-43.jpg"/>
-          <p:cNvPicPr>
-            <a:picLocks noChangeAspect="1"/>
-          </p:cNvPicPr>
+      <p:sp>
+        <p:nvSpPr>
+          <p:cNvPr id="3" name="사진 자리"/>
+          <p:cNvSpPr/>
           <p:nvPr/>
-        </p:nvPicPr>
-        <p:blipFill>
-          <a:blip r:embed="rId2"/>
-          <a:stretch>
-            <a:fillRect/>
-          </a:stretch>
-        </p:blipFill>
-        <p:spPr>
-          <a:xfrm>
-            <a:off x="0" y="0"/>
-            <a:ext cx="12191695" cy="6858000"/>
+        </p:nvSpPr>
+        <p:spPr>
+          <a:xfrm>
+            <a:off x="7071183" y="960120"/>
+            <a:ext cx="3657508" cy="4526280"/>
+          </a:xfrm>
+          <a:prstGeom prst="roundRect">
+            <a:avLst>
+              <a:gd name="adj" fmla="val 4000"/>
+            </a:avLst>
+          </a:prstGeom>
+          <a:solidFill>
+            <a:srgbClr val="EBADB8"/>
+          </a:solidFill>
+          <a:ln>
+            <a:noFill/>
+          </a:ln>
+        </p:spPr>
+        <p:txBody>
+          <a:bodyPr rtlCol="0" anchor="ctr" wrap="square" lIns="54864" rIns="54864" tIns="27432" bIns="27432">
+            <a:noAutofit/>
+          </a:bodyPr>
+          <a:lstStyle/>
+          <a:p>
+            <a:pPr algn="ctr">
+              <a:lnSpc>
+                <a:spcPct val="100000"/>
+              </a:lnSpc>
+            </a:pPr>
+            <a:r>
+              <a:rPr sz="1400" b="0" i="0">
+                <a:solidFill>
+                  <a:srgbClr val="49272D"/>
+                </a:solidFill>
+              </a:rPr>
+              <a:t>사진을 넣어 주세요</a:t>
+            </a:r>
+          </a:p>
+        </p:txBody>
+      </p:sp>
+      <p:sp>
+        <p:nvSpPr>
+          <p:cNvPr id="4" name="장식"/>
+          <p:cNvSpPr/>
+          <p:nvPr/>
+        </p:nvSpPr>
+        <p:spPr>
+          <a:xfrm>
+            <a:off x="7558851" y="1234439"/>
+            <a:ext cx="3657508" cy="4526280"/>
+          </a:xfrm>
+          <a:prstGeom prst="roundRect">
+            <a:avLst>
+              <a:gd name="adj" fmla="val 4000"/>
+            </a:avLst>
+          </a:prstGeom>
+          <a:noFill/>
+          <a:ln w="9525">
+            <a:solidFill>
+              <a:srgbClr val="26231F"/>
+            </a:solidFill>
+          </a:ln>
+        </p:spPr>
+        <p:txBody>
+          <a:bodyPr rtlCol="0" anchor="ctr"/>
+          <a:lstStyle/>
+          <a:p>
+            <a:pPr algn="ctr"/>
+          </a:p>
+        </p:txBody>
+      </p:sp>
+      <p:sp>
+        <p:nvSpPr>
+          <p:cNvPr id="5" name="라벨"/>
+          <p:cNvSpPr txBox="1"/>
+          <p:nvPr/>
+        </p:nvSpPr>
+        <p:spPr>
+          <a:xfrm>
+            <a:off x="822960" y="2148840"/>
+            <a:ext cx="5608179" cy="274320"/>
           </a:xfrm>
           <a:prstGeom prst="rect">
             <a:avLst/>
           </a:prstGeom>
-        </p:spPr>
-      </p:pic>
+          <a:noFill/>
+        </p:spPr>
+        <p:txBody>
+          <a:bodyPr wrap="square" lIns="54864" rIns="54864" tIns="27432" bIns="27432" anchor="t">
+            <a:noAutofit/>
+          </a:bodyPr>
+          <a:lstStyle/>
+          <a:p>
+            <a:pPr algn="l">
+              <a:lnSpc>
+                <a:spcPct val="115000"/>
+              </a:lnSpc>
+            </a:pPr>
+            <a:r>
+              <a:rPr sz="1000" b="1" i="0" spc="250">
+                <a:solidFill>
+                  <a:srgbClr val="26231F"/>
+                </a:solidFill>
+              </a:rPr>
+              <a:t>WEDDING</a:t>
+            </a:r>
+          </a:p>
+        </p:txBody>
+      </p:sp>
       <p:sp>
         <p:nvSpPr>
           <p:cNvPr id="2" name="Title 1"/>
@@ -3329,8 +3427,8 @@
         </p:nvSpPr>
         <p:spPr>
           <a:xfrm>
-            <a:off x="853418" y="2057400"/>
-            <a:ext cx="6095847" cy="1554480"/>
+            <a:off x="822960" y="2606040"/>
+            <a:ext cx="5608179" cy="1188720"/>
           </a:xfrm>
         </p:spPr>
         <p:txBody>
@@ -3347,7 +3445,7 @@
             <a:r>
               <a:rPr sz="3600" b="1" i="0">
                 <a:solidFill>
-                  <a:srgbClr val="431920"/>
+                  <a:srgbClr val="26231F"/>
                 </a:solidFill>
               </a:rPr>
               <a:t>저희 결혼합니다</a:t>
@@ -3357,14 +3455,14 @@
       </p:sp>
       <p:sp>
         <p:nvSpPr>
-          <p:cNvPr id="4" name="한 줄 문구"/>
+          <p:cNvPr id="6" name="한 줄 문구"/>
           <p:cNvSpPr txBox="1"/>
           <p:nvPr/>
         </p:nvSpPr>
         <p:spPr>
           <a:xfrm>
-            <a:off x="853418" y="3749039"/>
-            <a:ext cx="6095847" cy="822960"/>
+            <a:off x="822960" y="3886200"/>
+            <a:ext cx="5608179" cy="822960"/>
           </a:xfrm>
           <a:prstGeom prst="rect">
             <a:avLst/>
@@ -3383,26 +3481,26 @@
               </a:lnSpc>
             </a:pPr>
             <a:r>
-              <a:rPr sz="1700" b="0" i="1">
+              <a:rPr sz="1700" b="0" i="0">
                 <a:solidFill>
-                  <a:srgbClr val="431920"/>
+                  <a:srgbClr val="26231F"/>
                 </a:solidFill>
               </a:rPr>
-              <a:t>겨울이라 실내에서만 진행합니다</a:t>
-            </a:r>
-          </a:p>
-        </p:txBody>
-      </p:sp>
-      <p:sp>
-        <p:nvSpPr>
-          <p:cNvPr id="5" name="안내 문구"/>
+              <a:t>식은 실내에서만 진행합니다</a:t>
+            </a:r>
+          </a:p>
+        </p:txBody>
+      </p:sp>
+      <p:sp>
+        <p:nvSpPr>
+          <p:cNvPr id="7" name="안내 문구"/>
           <p:cNvSpPr txBox="1"/>
           <p:nvPr/>
         </p:nvSpPr>
         <p:spPr>
           <a:xfrm>
-            <a:off x="853418" y="4617720"/>
-            <a:ext cx="6095847" cy="914400"/>
+            <a:off x="822960" y="4754880"/>
+            <a:ext cx="5608179" cy="914400"/>
           </a:xfrm>
           <a:prstGeom prst="rect">
             <a:avLst/>
@@ -3423,7 +3521,7 @@
             <a:r>
               <a:rPr sz="1400" b="0" i="0">
                 <a:solidFill>
-                  <a:srgbClr val="666666"/>
+                  <a:srgbClr val="26231F"/>
                 </a:solidFill>
               </a:rPr>
               <a:t>신랑 이름 ♥ 신부 이름</a:t>
@@ -3438,10 +3536,10 @@
             <a:r>
               <a:rPr sz="1400" b="0" i="0">
                 <a:solidFill>
-                  <a:srgbClr val="666666"/>
+                  <a:srgbClr val="26231F"/>
                 </a:solidFill>
               </a:rPr>
-              <a:t>2027. 00. 00 · 예식장 이름</a:t>
+              <a:t>날짜 입력 · 예식장 이름</a:t>
             </a:r>
           </a:p>
         </p:txBody>
@@ -3480,14 +3578,14 @@
         </p:nvSpPr>
         <p:spPr>
           <a:xfrm>
-            <a:off x="-182880" y="6144768"/>
-            <a:ext cx="12557455" cy="731520"/>
-          </a:xfrm>
-          <a:prstGeom prst="wave">
+            <a:off x="0" y="6565392"/>
+            <a:ext cx="12191695" cy="292608"/>
+          </a:xfrm>
+          <a:prstGeom prst="rect">
             <a:avLst/>
           </a:prstGeom>
           <a:solidFill>
-            <a:srgbClr val="F0D1D6"/>
+            <a:srgbClr val="EBADB8"/>
           </a:solidFill>
           <a:ln>
             <a:noFill/>
@@ -3509,14 +3607,14 @@
         </p:nvSpPr>
         <p:spPr>
           <a:xfrm>
-            <a:off x="-182880" y="6400800"/>
-            <a:ext cx="12557455" cy="502920"/>
-          </a:xfrm>
-          <a:prstGeom prst="wave">
+            <a:off x="640080" y="6400800"/>
+            <a:ext cx="10911535" cy="10972"/>
+          </a:xfrm>
+          <a:prstGeom prst="rect">
             <a:avLst/>
           </a:prstGeom>
           <a:solidFill>
-            <a:srgbClr val="8D3443"/>
+            <a:srgbClr val="26231F"/>
           </a:solidFill>
           <a:ln>
             <a:noFill/>
@@ -3532,6 +3630,73 @@
       </p:sp>
       <p:sp>
         <p:nvSpPr>
+          <p:cNvPr id="5" name="하단 라벨"/>
+          <p:cNvSpPr txBox="1"/>
+          <p:nvPr/>
+        </p:nvSpPr>
+        <p:spPr>
+          <a:xfrm>
+            <a:off x="640080" y="6437376"/>
+            <a:ext cx="5486400" cy="274320"/>
+          </a:xfrm>
+          <a:prstGeom prst="rect">
+            <a:avLst/>
+          </a:prstGeom>
+          <a:noFill/>
+        </p:spPr>
+        <p:txBody>
+          <a:bodyPr wrap="square" lIns="54864" rIns="54864" tIns="27432" bIns="27432" anchor="ctr">
+            <a:noAutofit/>
+          </a:bodyPr>
+          <a:lstStyle/>
+          <a:p>
+            <a:pPr algn="l">
+              <a:lnSpc>
+                <a:spcPct val="115000"/>
+              </a:lnSpc>
+            </a:pPr>
+            <a:r>
+              <a:rPr sz="900" b="1" i="0" spc="250">
+                <a:solidFill>
+                  <a:srgbClr val="26231F"/>
+                </a:solidFill>
+              </a:rPr>
+              <a:t>WEDDING</a:t>
+            </a:r>
+          </a:p>
+        </p:txBody>
+      </p:sp>
+      <p:sp>
+        <p:nvSpPr>
+          <p:cNvPr id="6" name="포인트"/>
+          <p:cNvSpPr/>
+          <p:nvPr/>
+        </p:nvSpPr>
+        <p:spPr>
+          <a:xfrm>
+            <a:off x="11213287" y="6473952"/>
+            <a:ext cx="219456" cy="219456"/>
+          </a:xfrm>
+          <a:prstGeom prst="sun">
+            <a:avLst/>
+          </a:prstGeom>
+          <a:solidFill>
+            <a:srgbClr val="E198A4"/>
+          </a:solidFill>
+          <a:ln>
+            <a:noFill/>
+          </a:ln>
+        </p:spPr>
+        <p:txBody>
+          <a:bodyPr rtlCol="0" anchor="ctr"/>
+          <a:lstStyle/>
+          <a:p>
+            <a:pPr algn="ctr"/>
+          </a:p>
+        </p:txBody>
+      </p:sp>
+      <p:sp>
+        <p:nvSpPr>
           <p:cNvPr id="2" name="Title 1"/>
           <p:cNvSpPr>
             <a:spLocks noGrp="1"/>
@@ -3542,8 +3707,8 @@
         </p:nvSpPr>
         <p:spPr>
           <a:xfrm>
-            <a:off x="640080" y="457200"/>
-            <a:ext cx="9722815" cy="868680"/>
+            <a:off x="640080" y="502920"/>
+            <a:ext cx="10911535" cy="914400"/>
           </a:xfrm>
         </p:spPr>
         <p:txBody>
@@ -3560,7 +3725,7 @@
             <a:r>
               <a:rPr sz="3000" b="1" i="0">
                 <a:solidFill>
-                  <a:srgbClr val="431920"/>
+                  <a:srgbClr val="26231F"/>
                 </a:solidFill>
               </a:rPr>
               <a:t>신랑 · 신부 소개</a:t>
@@ -3570,25 +3735,23 @@
       </p:sp>
       <p:sp>
         <p:nvSpPr>
-          <p:cNvPr id="5" name="사진 자리"/>
+          <p:cNvPr id="7" name="사진 자리"/>
           <p:cNvSpPr/>
           <p:nvPr/>
         </p:nvSpPr>
         <p:spPr>
           <a:xfrm>
-            <a:off x="2042083" y="1554480"/>
-            <a:ext cx="2194560" cy="2194560"/>
+            <a:off x="1996363" y="1600200"/>
+            <a:ext cx="2286000" cy="2286000"/>
           </a:xfrm>
           <a:prstGeom prst="ellipse">
             <a:avLst/>
           </a:prstGeom>
           <a:solidFill>
-            <a:srgbClr val="F0D1D6"/>
+            <a:srgbClr val="F6D5DA"/>
           </a:solidFill>
           <a:ln w="19050">
-            <a:solidFill>
-              <a:srgbClr val="8D3443"/>
-            </a:solidFill>
+            <a:noFill/>
             <a:prstDash val="dash"/>
           </a:ln>
         </p:spPr>
@@ -3606,7 +3769,7 @@
             <a:r>
               <a:rPr sz="1200" b="0" i="0">
                 <a:solidFill>
-                  <a:srgbClr val="431920"/>
+                  <a:srgbClr val="8E8780"/>
                 </a:solidFill>
               </a:rPr>
               <a:t>사진</a:t>
@@ -3616,13 +3779,13 @@
       </p:sp>
       <p:sp>
         <p:nvSpPr>
-          <p:cNvPr id="6" name="TextBox 5"/>
+          <p:cNvPr id="8" name="TextBox 7"/>
           <p:cNvSpPr txBox="1"/>
           <p:nvPr/>
         </p:nvSpPr>
         <p:spPr>
           <a:xfrm>
-            <a:off x="640080" y="3840479"/>
+            <a:off x="640080" y="3977639"/>
             <a:ext cx="4998567" cy="411480"/>
           </a:xfrm>
           <a:prstGeom prst="rect">
@@ -3644,7 +3807,7 @@
             <a:r>
               <a:rPr sz="1600" b="1" i="0">
                 <a:solidFill>
-                  <a:srgbClr val="431920"/>
+                  <a:srgbClr val="49272D"/>
                 </a:solidFill>
               </a:rPr>
               <a:t>신랑</a:t>
@@ -3654,14 +3817,14 @@
       </p:sp>
       <p:sp>
         <p:nvSpPr>
-          <p:cNvPr id="7" name="TextBox 6"/>
+          <p:cNvPr id="9" name="TextBox 8"/>
           <p:cNvSpPr txBox="1"/>
           <p:nvPr/>
         </p:nvSpPr>
         <p:spPr>
           <a:xfrm>
-            <a:off x="731519" y="4297679"/>
-            <a:ext cx="4815687" cy="1645919"/>
+            <a:off x="731519" y="4434840"/>
+            <a:ext cx="4815687" cy="1737360"/>
           </a:xfrm>
           <a:prstGeom prst="rect">
             <a:avLst/>
@@ -3722,25 +3885,23 @@
       </p:sp>
       <p:sp>
         <p:nvSpPr>
-          <p:cNvPr id="8" name="사진 자리"/>
+          <p:cNvPr id="10" name="사진 자리"/>
           <p:cNvSpPr/>
           <p:nvPr/>
         </p:nvSpPr>
         <p:spPr>
           <a:xfrm>
-            <a:off x="7955051" y="1554480"/>
-            <a:ext cx="2194560" cy="2194560"/>
+            <a:off x="7909331" y="1600200"/>
+            <a:ext cx="2286000" cy="2286000"/>
           </a:xfrm>
           <a:prstGeom prst="ellipse">
             <a:avLst/>
           </a:prstGeom>
           <a:solidFill>
-            <a:srgbClr val="F0D1D6"/>
+            <a:srgbClr val="F6D5DA"/>
           </a:solidFill>
           <a:ln w="19050">
-            <a:solidFill>
-              <a:srgbClr val="8D3443"/>
-            </a:solidFill>
+            <a:noFill/>
             <a:prstDash val="dash"/>
           </a:ln>
         </p:spPr>
@@ -3758,7 +3919,7 @@
             <a:r>
               <a:rPr sz="1200" b="0" i="0">
                 <a:solidFill>
-                  <a:srgbClr val="431920"/>
+                  <a:srgbClr val="8E8780"/>
                 </a:solidFill>
               </a:rPr>
               <a:t>사진</a:t>
@@ -3768,13 +3929,13 @@
       </p:sp>
       <p:sp>
         <p:nvSpPr>
-          <p:cNvPr id="9" name="TextBox 8"/>
+          <p:cNvPr id="11" name="TextBox 10"/>
           <p:cNvSpPr txBox="1"/>
           <p:nvPr/>
         </p:nvSpPr>
         <p:spPr>
           <a:xfrm>
-            <a:off x="6553047" y="3840479"/>
+            <a:off x="6553047" y="3977639"/>
             <a:ext cx="4998567" cy="411480"/>
           </a:xfrm>
           <a:prstGeom prst="rect">
@@ -3796,7 +3957,7 @@
             <a:r>
               <a:rPr sz="1600" b="1" i="0">
                 <a:solidFill>
-                  <a:srgbClr val="431920"/>
+                  <a:srgbClr val="49272D"/>
                 </a:solidFill>
               </a:rPr>
               <a:t>신부</a:t>
@@ -3806,14 +3967,14 @@
       </p:sp>
       <p:sp>
         <p:nvSpPr>
-          <p:cNvPr id="10" name="TextBox 9"/>
+          <p:cNvPr id="12" name="TextBox 11"/>
           <p:cNvSpPr txBox="1"/>
           <p:nvPr/>
         </p:nvSpPr>
         <p:spPr>
           <a:xfrm>
-            <a:off x="6644487" y="4297679"/>
-            <a:ext cx="4815687" cy="1645919"/>
+            <a:off x="6644487" y="4434840"/>
+            <a:ext cx="4815687" cy="1737360"/>
           </a:xfrm>
           <a:prstGeom prst="rect">
             <a:avLst/>
@@ -3906,14 +4067,14 @@
         </p:nvSpPr>
         <p:spPr>
           <a:xfrm>
-            <a:off x="-182880" y="6144768"/>
-            <a:ext cx="12557455" cy="731520"/>
-          </a:xfrm>
-          <a:prstGeom prst="wave">
+            <a:off x="0" y="6565392"/>
+            <a:ext cx="12191695" cy="292608"/>
+          </a:xfrm>
+          <a:prstGeom prst="rect">
             <a:avLst/>
           </a:prstGeom>
           <a:solidFill>
-            <a:srgbClr val="F0D1D6"/>
+            <a:srgbClr val="EBADB8"/>
           </a:solidFill>
           <a:ln>
             <a:noFill/>
@@ -3935,14 +4096,14 @@
         </p:nvSpPr>
         <p:spPr>
           <a:xfrm>
-            <a:off x="-182880" y="6400800"/>
-            <a:ext cx="12557455" cy="502920"/>
-          </a:xfrm>
-          <a:prstGeom prst="wave">
+            <a:off x="640080" y="6400800"/>
+            <a:ext cx="10911535" cy="10972"/>
+          </a:xfrm>
+          <a:prstGeom prst="rect">
             <a:avLst/>
           </a:prstGeom>
           <a:solidFill>
-            <a:srgbClr val="8D3443"/>
+            <a:srgbClr val="26231F"/>
           </a:solidFill>
           <a:ln>
             <a:noFill/>
@@ -3958,6 +4119,73 @@
       </p:sp>
       <p:sp>
         <p:nvSpPr>
+          <p:cNvPr id="5" name="하단 라벨"/>
+          <p:cNvSpPr txBox="1"/>
+          <p:nvPr/>
+        </p:nvSpPr>
+        <p:spPr>
+          <a:xfrm>
+            <a:off x="640080" y="6437376"/>
+            <a:ext cx="5486400" cy="274320"/>
+          </a:xfrm>
+          <a:prstGeom prst="rect">
+            <a:avLst/>
+          </a:prstGeom>
+          <a:noFill/>
+        </p:spPr>
+        <p:txBody>
+          <a:bodyPr wrap="square" lIns="54864" rIns="54864" tIns="27432" bIns="27432" anchor="ctr">
+            <a:noAutofit/>
+          </a:bodyPr>
+          <a:lstStyle/>
+          <a:p>
+            <a:pPr algn="l">
+              <a:lnSpc>
+                <a:spcPct val="115000"/>
+              </a:lnSpc>
+            </a:pPr>
+            <a:r>
+              <a:rPr sz="900" b="1" i="0" spc="250">
+                <a:solidFill>
+                  <a:srgbClr val="26231F"/>
+                </a:solidFill>
+              </a:rPr>
+              <a:t>WEDDING</a:t>
+            </a:r>
+          </a:p>
+        </p:txBody>
+      </p:sp>
+      <p:sp>
+        <p:nvSpPr>
+          <p:cNvPr id="6" name="포인트"/>
+          <p:cNvSpPr/>
+          <p:nvPr/>
+        </p:nvSpPr>
+        <p:spPr>
+          <a:xfrm>
+            <a:off x="11213287" y="6473952"/>
+            <a:ext cx="219456" cy="219456"/>
+          </a:xfrm>
+          <a:prstGeom prst="sun">
+            <a:avLst/>
+          </a:prstGeom>
+          <a:solidFill>
+            <a:srgbClr val="E198A4"/>
+          </a:solidFill>
+          <a:ln>
+            <a:noFill/>
+          </a:ln>
+        </p:spPr>
+        <p:txBody>
+          <a:bodyPr rtlCol="0" anchor="ctr"/>
+          <a:lstStyle/>
+          <a:p>
+            <a:pPr algn="ctr"/>
+          </a:p>
+        </p:txBody>
+      </p:sp>
+      <p:sp>
+        <p:nvSpPr>
           <p:cNvPr id="2" name="Title 1"/>
           <p:cNvSpPr>
             <a:spLocks noGrp="1"/>
@@ -3968,8 +4196,8 @@
         </p:nvSpPr>
         <p:spPr>
           <a:xfrm>
-            <a:off x="640080" y="457200"/>
-            <a:ext cx="9722815" cy="868680"/>
+            <a:off x="640080" y="502920"/>
+            <a:ext cx="10911535" cy="914400"/>
           </a:xfrm>
         </p:spPr>
         <p:txBody>
@@ -3986,7 +4214,7 @@
             <a:r>
               <a:rPr sz="3000" b="1" i="0">
                 <a:solidFill>
-                  <a:srgbClr val="431920"/>
+                  <a:srgbClr val="26231F"/>
                 </a:solidFill>
               </a:rPr>
               <a:t>식순 안내</a:t>
@@ -3996,14 +4224,14 @@
       </p:sp>
       <p:graphicFrame>
         <p:nvGraphicFramePr>
-          <p:cNvPr id="5" name="표"/>
+          <p:cNvPr id="7" name="표"/>
           <p:cNvGraphicFramePr>
             <a:graphicFrameLocks noGrp="1"/>
           </p:cNvGraphicFramePr>
           <p:nvPr/>
         </p:nvGraphicFramePr>
         <p:xfrm>
-          <a:off x="640080" y="1554480"/>
+          <a:off x="640080" y="1600200"/>
           <a:ext cx="10911535" cy="3950208"/>
         </p:xfrm>
         <a:graphic>
@@ -4027,7 +4255,7 @@
                       <a:r>
                         <a:rPr sz="1500" b="1">
                           <a:solidFill>
-                            <a:srgbClr val="FFFFFF"/>
+                            <a:srgbClr val="26231F"/>
                           </a:solidFill>
                         </a:rPr>
                         <a:t>시간</a:t>
@@ -4037,30 +4265,30 @@
                   <a:tcPr anchor="ctr" marL="73152" marR="73152">
                     <a:lnL w="9525" cap="flat" cmpd="sng" algn="ctr">
                       <a:solidFill>
-                        <a:srgbClr val="8D3443"/>
+                        <a:srgbClr val="E198A4"/>
                       </a:solidFill>
                       <a:prstDash val="solid"/>
                     </a:lnL>
                     <a:lnR w="9525" cap="flat" cmpd="sng" algn="ctr">
                       <a:solidFill>
-                        <a:srgbClr val="8D3443"/>
+                        <a:srgbClr val="E198A4"/>
                       </a:solidFill>
                       <a:prstDash val="solid"/>
                     </a:lnR>
                     <a:lnT w="9525" cap="flat" cmpd="sng" algn="ctr">
                       <a:solidFill>
-                        <a:srgbClr val="8D3443"/>
+                        <a:srgbClr val="E198A4"/>
                       </a:solidFill>
                       <a:prstDash val="solid"/>
                     </a:lnT>
                     <a:lnB w="9525" cap="flat" cmpd="sng" algn="ctr">
                       <a:solidFill>
-                        <a:srgbClr val="8D3443"/>
+                        <a:srgbClr val="E198A4"/>
                       </a:solidFill>
                       <a:prstDash val="solid"/>
                     </a:lnB>
                     <a:solidFill>
-                      <a:srgbClr val="8D3443"/>
+                      <a:srgbClr val="E198A4"/>
                     </a:solidFill>
                   </a:tcPr>
                 </a:tc>
@@ -4073,7 +4301,7 @@
                       <a:r>
                         <a:rPr sz="1500" b="1">
                           <a:solidFill>
-                            <a:srgbClr val="FFFFFF"/>
+                            <a:srgbClr val="26231F"/>
                           </a:solidFill>
                         </a:rPr>
                         <a:t>순서</a:t>
@@ -4083,30 +4311,30 @@
                   <a:tcPr anchor="ctr" marL="73152" marR="73152">
                     <a:lnL w="9525" cap="flat" cmpd="sng" algn="ctr">
                       <a:solidFill>
-                        <a:srgbClr val="8D3443"/>
+                        <a:srgbClr val="E198A4"/>
                       </a:solidFill>
                       <a:prstDash val="solid"/>
                     </a:lnL>
                     <a:lnR w="9525" cap="flat" cmpd="sng" algn="ctr">
                       <a:solidFill>
-                        <a:srgbClr val="8D3443"/>
+                        <a:srgbClr val="E198A4"/>
                       </a:solidFill>
                       <a:prstDash val="solid"/>
                     </a:lnR>
                     <a:lnT w="9525" cap="flat" cmpd="sng" algn="ctr">
                       <a:solidFill>
-                        <a:srgbClr val="8D3443"/>
+                        <a:srgbClr val="E198A4"/>
                       </a:solidFill>
                       <a:prstDash val="solid"/>
                     </a:lnT>
                     <a:lnB w="9525" cap="flat" cmpd="sng" algn="ctr">
                       <a:solidFill>
-                        <a:srgbClr val="8D3443"/>
+                        <a:srgbClr val="E198A4"/>
                       </a:solidFill>
                       <a:prstDash val="solid"/>
                     </a:lnB>
                     <a:solidFill>
-                      <a:srgbClr val="8D3443"/>
+                      <a:srgbClr val="E198A4"/>
                     </a:solidFill>
                   </a:tcPr>
                 </a:tc>
@@ -4119,7 +4347,7 @@
                       <a:r>
                         <a:rPr sz="1500" b="1">
                           <a:solidFill>
-                            <a:srgbClr val="FFFFFF"/>
+                            <a:srgbClr val="26231F"/>
                           </a:solidFill>
                         </a:rPr>
                         <a:t>담당</a:t>
@@ -4129,30 +4357,30 @@
                   <a:tcPr anchor="ctr" marL="73152" marR="73152">
                     <a:lnL w="9525" cap="flat" cmpd="sng" algn="ctr">
                       <a:solidFill>
-                        <a:srgbClr val="8D3443"/>
+                        <a:srgbClr val="E198A4"/>
                       </a:solidFill>
                       <a:prstDash val="solid"/>
                     </a:lnL>
                     <a:lnR w="9525" cap="flat" cmpd="sng" algn="ctr">
                       <a:solidFill>
-                        <a:srgbClr val="8D3443"/>
+                        <a:srgbClr val="E198A4"/>
                       </a:solidFill>
                       <a:prstDash val="solid"/>
                     </a:lnR>
                     <a:lnT w="9525" cap="flat" cmpd="sng" algn="ctr">
                       <a:solidFill>
-                        <a:srgbClr val="8D3443"/>
+                        <a:srgbClr val="E198A4"/>
                       </a:solidFill>
                       <a:prstDash val="solid"/>
                     </a:lnT>
                     <a:lnB w="9525" cap="flat" cmpd="sng" algn="ctr">
                       <a:solidFill>
-                        <a:srgbClr val="8D3443"/>
+                        <a:srgbClr val="E198A4"/>
                       </a:solidFill>
                       <a:prstDash val="solid"/>
                     </a:lnB>
                     <a:solidFill>
-                      <a:srgbClr val="8D3443"/>
+                      <a:srgbClr val="E198A4"/>
                     </a:solidFill>
                   </a:tcPr>
                 </a:tc>
@@ -4167,7 +4395,7 @@
                       <a:r>
                         <a:rPr sz="1500" b="1">
                           <a:solidFill>
-                            <a:srgbClr val="431920"/>
+                            <a:srgbClr val="49272D"/>
                           </a:solidFill>
                         </a:rPr>
                         <a:t>00:00</a:t>
@@ -4177,30 +4405,30 @@
                   <a:tcPr anchor="ctr" marL="73152" marR="73152">
                     <a:lnL w="9525" cap="flat" cmpd="sng" algn="ctr">
                       <a:solidFill>
-                        <a:srgbClr val="F0D1D6"/>
+                        <a:srgbClr val="F6D5DA"/>
                       </a:solidFill>
                       <a:prstDash val="solid"/>
                     </a:lnL>
                     <a:lnR w="9525" cap="flat" cmpd="sng" algn="ctr">
                       <a:solidFill>
-                        <a:srgbClr val="F0D1D6"/>
+                        <a:srgbClr val="F6D5DA"/>
                       </a:solidFill>
                       <a:prstDash val="solid"/>
                     </a:lnR>
                     <a:lnT w="9525" cap="flat" cmpd="sng" algn="ctr">
                       <a:solidFill>
-                        <a:srgbClr val="F0D1D6"/>
+                        <a:srgbClr val="F6D5DA"/>
                       </a:solidFill>
                       <a:prstDash val="solid"/>
                     </a:lnT>
                     <a:lnB w="9525" cap="flat" cmpd="sng" algn="ctr">
                       <a:solidFill>
-                        <a:srgbClr val="F0D1D6"/>
+                        <a:srgbClr val="F6D5DA"/>
                       </a:solidFill>
                       <a:prstDash val="solid"/>
                     </a:lnB>
                     <a:solidFill>
-                      <a:srgbClr val="F0D1D6"/>
+                      <a:srgbClr val="F6D5DA"/>
                     </a:solidFill>
                   </a:tcPr>
                 </a:tc>
@@ -4213,7 +4441,7 @@
                       <a:r>
                         <a:rPr sz="1500" b="0">
                           <a:solidFill>
-                            <a:srgbClr val="2B2B2B"/>
+                            <a:srgbClr val="26231F"/>
                           </a:solidFill>
                         </a:rPr>
                         <a:t>하객 맞이</a:t>
@@ -4223,25 +4451,25 @@
                   <a:tcPr anchor="ctr" marL="73152" marR="73152">
                     <a:lnL w="9525" cap="flat" cmpd="sng" algn="ctr">
                       <a:solidFill>
-                        <a:srgbClr val="F0D1D6"/>
+                        <a:srgbClr val="F6D5DA"/>
                       </a:solidFill>
                       <a:prstDash val="solid"/>
                     </a:lnL>
                     <a:lnR w="9525" cap="flat" cmpd="sng" algn="ctr">
                       <a:solidFill>
-                        <a:srgbClr val="F0D1D6"/>
+                        <a:srgbClr val="F6D5DA"/>
                       </a:solidFill>
                       <a:prstDash val="solid"/>
                     </a:lnR>
                     <a:lnT w="9525" cap="flat" cmpd="sng" algn="ctr">
                       <a:solidFill>
-                        <a:srgbClr val="F0D1D6"/>
+                        <a:srgbClr val="F6D5DA"/>
                       </a:solidFill>
                       <a:prstDash val="solid"/>
                     </a:lnT>
                     <a:lnB w="9525" cap="flat" cmpd="sng" algn="ctr">
                       <a:solidFill>
-                        <a:srgbClr val="F0D1D6"/>
+                        <a:srgbClr val="F6D5DA"/>
                       </a:solidFill>
                       <a:prstDash val="solid"/>
                     </a:lnB>
@@ -4259,7 +4487,7 @@
                       <a:r>
                         <a:rPr sz="1500" b="0">
                           <a:solidFill>
-                            <a:srgbClr val="2B2B2B"/>
+                            <a:srgbClr val="26231F"/>
                           </a:solidFill>
                         </a:rPr>
                         <a:t/>
@@ -4269,25 +4497,25 @@
                   <a:tcPr anchor="ctr" marL="73152" marR="73152">
                     <a:lnL w="9525" cap="flat" cmpd="sng" algn="ctr">
                       <a:solidFill>
-                        <a:srgbClr val="F0D1D6"/>
+                        <a:srgbClr val="F6D5DA"/>
                       </a:solidFill>
                       <a:prstDash val="solid"/>
                     </a:lnL>
                     <a:lnR w="9525" cap="flat" cmpd="sng" algn="ctr">
                       <a:solidFill>
-                        <a:srgbClr val="F0D1D6"/>
+                        <a:srgbClr val="F6D5DA"/>
                       </a:solidFill>
                       <a:prstDash val="solid"/>
                     </a:lnR>
                     <a:lnT w="9525" cap="flat" cmpd="sng" algn="ctr">
                       <a:solidFill>
-                        <a:srgbClr val="F0D1D6"/>
+                        <a:srgbClr val="F6D5DA"/>
                       </a:solidFill>
                       <a:prstDash val="solid"/>
                     </a:lnT>
                     <a:lnB w="9525" cap="flat" cmpd="sng" algn="ctr">
                       <a:solidFill>
-                        <a:srgbClr val="F0D1D6"/>
+                        <a:srgbClr val="F6D5DA"/>
                       </a:solidFill>
                       <a:prstDash val="solid"/>
                     </a:lnB>
@@ -4307,7 +4535,7 @@
                       <a:r>
                         <a:rPr sz="1500" b="1">
                           <a:solidFill>
-                            <a:srgbClr val="431920"/>
+                            <a:srgbClr val="49272D"/>
                           </a:solidFill>
                         </a:rPr>
                         <a:t>00:00</a:t>
@@ -4317,30 +4545,30 @@
                   <a:tcPr anchor="ctr" marL="73152" marR="73152">
                     <a:lnL w="9525" cap="flat" cmpd="sng" algn="ctr">
                       <a:solidFill>
-                        <a:srgbClr val="F0D1D6"/>
+                        <a:srgbClr val="F6D5DA"/>
                       </a:solidFill>
                       <a:prstDash val="solid"/>
                     </a:lnL>
                     <a:lnR w="9525" cap="flat" cmpd="sng" algn="ctr">
                       <a:solidFill>
-                        <a:srgbClr val="F0D1D6"/>
+                        <a:srgbClr val="F6D5DA"/>
                       </a:solidFill>
                       <a:prstDash val="solid"/>
                     </a:lnR>
                     <a:lnT w="9525" cap="flat" cmpd="sng" algn="ctr">
                       <a:solidFill>
-                        <a:srgbClr val="F0D1D6"/>
+                        <a:srgbClr val="F6D5DA"/>
                       </a:solidFill>
                       <a:prstDash val="solid"/>
                     </a:lnT>
                     <a:lnB w="9525" cap="flat" cmpd="sng" algn="ctr">
                       <a:solidFill>
-                        <a:srgbClr val="F0D1D6"/>
+                        <a:srgbClr val="F6D5DA"/>
                       </a:solidFill>
                       <a:prstDash val="solid"/>
                     </a:lnB>
                     <a:solidFill>
-                      <a:srgbClr val="F0D1D6"/>
+                      <a:srgbClr val="F6D5DA"/>
                     </a:solidFill>
                   </a:tcPr>
                 </a:tc>
@@ -4353,7 +4581,7 @@
                       <a:r>
                         <a:rPr sz="1500" b="0">
                           <a:solidFill>
-                            <a:srgbClr val="2B2B2B"/>
+                            <a:srgbClr val="26231F"/>
                           </a:solidFill>
                         </a:rPr>
                         <a:t>신랑 · 신부 입장</a:t>
@@ -4363,30 +4591,30 @@
                   <a:tcPr anchor="ctr" marL="73152" marR="73152">
                     <a:lnL w="9525" cap="flat" cmpd="sng" algn="ctr">
                       <a:solidFill>
-                        <a:srgbClr val="F0D1D6"/>
+                        <a:srgbClr val="F6D5DA"/>
                       </a:solidFill>
                       <a:prstDash val="solid"/>
                     </a:lnL>
                     <a:lnR w="9525" cap="flat" cmpd="sng" algn="ctr">
                       <a:solidFill>
-                        <a:srgbClr val="F0D1D6"/>
+                        <a:srgbClr val="F6D5DA"/>
                       </a:solidFill>
                       <a:prstDash val="solid"/>
                     </a:lnR>
                     <a:lnT w="9525" cap="flat" cmpd="sng" algn="ctr">
                       <a:solidFill>
-                        <a:srgbClr val="F0D1D6"/>
+                        <a:srgbClr val="F6D5DA"/>
                       </a:solidFill>
                       <a:prstDash val="solid"/>
                     </a:lnT>
                     <a:lnB w="9525" cap="flat" cmpd="sng" algn="ctr">
                       <a:solidFill>
-                        <a:srgbClr val="F0D1D6"/>
+                        <a:srgbClr val="F6D5DA"/>
                       </a:solidFill>
                       <a:prstDash val="solid"/>
                     </a:lnB>
                     <a:solidFill>
-                      <a:srgbClr val="F9F0F2"/>
+                      <a:srgbClr val="FBECEF"/>
                     </a:solidFill>
                   </a:tcPr>
                 </a:tc>
@@ -4399,7 +4627,7 @@
                       <a:r>
                         <a:rPr sz="1500" b="0">
                           <a:solidFill>
-                            <a:srgbClr val="2B2B2B"/>
+                            <a:srgbClr val="26231F"/>
                           </a:solidFill>
                         </a:rPr>
                         <a:t/>
@@ -4409,30 +4637,30 @@
                   <a:tcPr anchor="ctr" marL="73152" marR="73152">
                     <a:lnL w="9525" cap="flat" cmpd="sng" algn="ctr">
                       <a:solidFill>
-                        <a:srgbClr val="F0D1D6"/>
+                        <a:srgbClr val="F6D5DA"/>
                       </a:solidFill>
                       <a:prstDash val="solid"/>
                     </a:lnL>
                     <a:lnR w="9525" cap="flat" cmpd="sng" algn="ctr">
                       <a:solidFill>
-                        <a:srgbClr val="F0D1D6"/>
+                        <a:srgbClr val="F6D5DA"/>
                       </a:solidFill>
                       <a:prstDash val="solid"/>
                     </a:lnR>
                     <a:lnT w="9525" cap="flat" cmpd="sng" algn="ctr">
                       <a:solidFill>
-                        <a:srgbClr val="F0D1D6"/>
+                        <a:srgbClr val="F6D5DA"/>
                       </a:solidFill>
                       <a:prstDash val="solid"/>
                     </a:lnT>
                     <a:lnB w="9525" cap="flat" cmpd="sng" algn="ctr">
                       <a:solidFill>
-                        <a:srgbClr val="F0D1D6"/>
+                        <a:srgbClr val="F6D5DA"/>
                       </a:solidFill>
                       <a:prstDash val="solid"/>
                     </a:lnB>
                     <a:solidFill>
-                      <a:srgbClr val="F9F0F2"/>
+                      <a:srgbClr val="FBECEF"/>
                     </a:solidFill>
                   </a:tcPr>
                 </a:tc>
@@ -4447,7 +4675,7 @@
                       <a:r>
                         <a:rPr sz="1500" b="1">
                           <a:solidFill>
-                            <a:srgbClr val="431920"/>
+                            <a:srgbClr val="49272D"/>
                           </a:solidFill>
                         </a:rPr>
                         <a:t>00:00</a:t>
@@ -4457,30 +4685,30 @@
                   <a:tcPr anchor="ctr" marL="73152" marR="73152">
                     <a:lnL w="9525" cap="flat" cmpd="sng" algn="ctr">
                       <a:solidFill>
-                        <a:srgbClr val="F0D1D6"/>
+                        <a:srgbClr val="F6D5DA"/>
                       </a:solidFill>
                       <a:prstDash val="solid"/>
                     </a:lnL>
                     <a:lnR w="9525" cap="flat" cmpd="sng" algn="ctr">
                       <a:solidFill>
-                        <a:srgbClr val="F0D1D6"/>
+                        <a:srgbClr val="F6D5DA"/>
                       </a:solidFill>
                       <a:prstDash val="solid"/>
                     </a:lnR>
                     <a:lnT w="9525" cap="flat" cmpd="sng" algn="ctr">
                       <a:solidFill>
-                        <a:srgbClr val="F0D1D6"/>
+                        <a:srgbClr val="F6D5DA"/>
                       </a:solidFill>
                       <a:prstDash val="solid"/>
                     </a:lnT>
                     <a:lnB w="9525" cap="flat" cmpd="sng" algn="ctr">
                       <a:solidFill>
-                        <a:srgbClr val="F0D1D6"/>
+                        <a:srgbClr val="F6D5DA"/>
                       </a:solidFill>
                       <a:prstDash val="solid"/>
                     </a:lnB>
                     <a:solidFill>
-                      <a:srgbClr val="F0D1D6"/>
+                      <a:srgbClr val="F6D5DA"/>
                     </a:solidFill>
                   </a:tcPr>
                 </a:tc>
@@ -4493,7 +4721,7 @@
                       <a:r>
                         <a:rPr sz="1500" b="0">
                           <a:solidFill>
-                            <a:srgbClr val="2B2B2B"/>
+                            <a:srgbClr val="26231F"/>
                           </a:solidFill>
                         </a:rPr>
                         <a:t>혼인 서약</a:t>
@@ -4503,25 +4731,25 @@
                   <a:tcPr anchor="ctr" marL="73152" marR="73152">
                     <a:lnL w="9525" cap="flat" cmpd="sng" algn="ctr">
                       <a:solidFill>
-                        <a:srgbClr val="F0D1D6"/>
+                        <a:srgbClr val="F6D5DA"/>
                       </a:solidFill>
                       <a:prstDash val="solid"/>
                     </a:lnL>
                     <a:lnR w="9525" cap="flat" cmpd="sng" algn="ctr">
                       <a:solidFill>
-                        <a:srgbClr val="F0D1D6"/>
+                        <a:srgbClr val="F6D5DA"/>
                       </a:solidFill>
                       <a:prstDash val="solid"/>
                     </a:lnR>
                     <a:lnT w="9525" cap="flat" cmpd="sng" algn="ctr">
                       <a:solidFill>
-                        <a:srgbClr val="F0D1D6"/>
+                        <a:srgbClr val="F6D5DA"/>
                       </a:solidFill>
                       <a:prstDash val="solid"/>
                     </a:lnT>
                     <a:lnB w="9525" cap="flat" cmpd="sng" algn="ctr">
                       <a:solidFill>
-                        <a:srgbClr val="F0D1D6"/>
+                        <a:srgbClr val="F6D5DA"/>
                       </a:solidFill>
                       <a:prstDash val="solid"/>
                     </a:lnB>
@@ -4539,7 +4767,7 @@
                       <a:r>
                         <a:rPr sz="1500" b="0">
                           <a:solidFill>
-                            <a:srgbClr val="2B2B2B"/>
+                            <a:srgbClr val="26231F"/>
                           </a:solidFill>
                         </a:rPr>
                         <a:t/>
@@ -4549,25 +4777,25 @@
                   <a:tcPr anchor="ctr" marL="73152" marR="73152">
                     <a:lnL w="9525" cap="flat" cmpd="sng" algn="ctr">
                       <a:solidFill>
-                        <a:srgbClr val="F0D1D6"/>
+                        <a:srgbClr val="F6D5DA"/>
                       </a:solidFill>
                       <a:prstDash val="solid"/>
                     </a:lnL>
                     <a:lnR w="9525" cap="flat" cmpd="sng" algn="ctr">
                       <a:solidFill>
-                        <a:srgbClr val="F0D1D6"/>
+                        <a:srgbClr val="F6D5DA"/>
                       </a:solidFill>
                       <a:prstDash val="solid"/>
                     </a:lnR>
                     <a:lnT w="9525" cap="flat" cmpd="sng" algn="ctr">
                       <a:solidFill>
-                        <a:srgbClr val="F0D1D6"/>
+                        <a:srgbClr val="F6D5DA"/>
                       </a:solidFill>
                       <a:prstDash val="solid"/>
                     </a:lnT>
                     <a:lnB w="9525" cap="flat" cmpd="sng" algn="ctr">
                       <a:solidFill>
-                        <a:srgbClr val="F0D1D6"/>
+                        <a:srgbClr val="F6D5DA"/>
                       </a:solidFill>
                       <a:prstDash val="solid"/>
                     </a:lnB>
@@ -4587,7 +4815,7 @@
                       <a:r>
                         <a:rPr sz="1500" b="1">
                           <a:solidFill>
-                            <a:srgbClr val="431920"/>
+                            <a:srgbClr val="49272D"/>
                           </a:solidFill>
                         </a:rPr>
                         <a:t>00:00</a:t>
@@ -4597,30 +4825,30 @@
                   <a:tcPr anchor="ctr" marL="73152" marR="73152">
                     <a:lnL w="9525" cap="flat" cmpd="sng" algn="ctr">
                       <a:solidFill>
-                        <a:srgbClr val="F0D1D6"/>
+                        <a:srgbClr val="F6D5DA"/>
                       </a:solidFill>
                       <a:prstDash val="solid"/>
                     </a:lnL>
                     <a:lnR w="9525" cap="flat" cmpd="sng" algn="ctr">
                       <a:solidFill>
-                        <a:srgbClr val="F0D1D6"/>
+                        <a:srgbClr val="F6D5DA"/>
                       </a:solidFill>
                       <a:prstDash val="solid"/>
                     </a:lnR>
                     <a:lnT w="9525" cap="flat" cmpd="sng" algn="ctr">
                       <a:solidFill>
-                        <a:srgbClr val="F0D1D6"/>
+                        <a:srgbClr val="F6D5DA"/>
                       </a:solidFill>
                       <a:prstDash val="solid"/>
                     </a:lnT>
                     <a:lnB w="9525" cap="flat" cmpd="sng" algn="ctr">
                       <a:solidFill>
-                        <a:srgbClr val="F0D1D6"/>
+                        <a:srgbClr val="F6D5DA"/>
                       </a:solidFill>
                       <a:prstDash val="solid"/>
                     </a:lnB>
                     <a:solidFill>
-                      <a:srgbClr val="F0D1D6"/>
+                      <a:srgbClr val="F6D5DA"/>
                     </a:solidFill>
                   </a:tcPr>
                 </a:tc>
@@ -4633,7 +4861,7 @@
                       <a:r>
                         <a:rPr sz="1500" b="0">
                           <a:solidFill>
-                            <a:srgbClr val="2B2B2B"/>
+                            <a:srgbClr val="26231F"/>
                           </a:solidFill>
                         </a:rPr>
                         <a:t>축가 · 감사 인사</a:t>
@@ -4643,30 +4871,30 @@
                   <a:tcPr anchor="ctr" marL="73152" marR="73152">
                     <a:lnL w="9525" cap="flat" cmpd="sng" algn="ctr">
                       <a:solidFill>
-                        <a:srgbClr val="F0D1D6"/>
+                        <a:srgbClr val="F6D5DA"/>
                       </a:solidFill>
                       <a:prstDash val="solid"/>
                     </a:lnL>
                     <a:lnR w="9525" cap="flat" cmpd="sng" algn="ctr">
                       <a:solidFill>
-                        <a:srgbClr val="F0D1D6"/>
+                        <a:srgbClr val="F6D5DA"/>
                       </a:solidFill>
                       <a:prstDash val="solid"/>
                     </a:lnR>
                     <a:lnT w="9525" cap="flat" cmpd="sng" algn="ctr">
                       <a:solidFill>
-                        <a:srgbClr val="F0D1D6"/>
+                        <a:srgbClr val="F6D5DA"/>
                       </a:solidFill>
                       <a:prstDash val="solid"/>
                     </a:lnT>
                     <a:lnB w="9525" cap="flat" cmpd="sng" algn="ctr">
                       <a:solidFill>
-                        <a:srgbClr val="F0D1D6"/>
+                        <a:srgbClr val="F6D5DA"/>
                       </a:solidFill>
                       <a:prstDash val="solid"/>
                     </a:lnB>
                     <a:solidFill>
-                      <a:srgbClr val="F9F0F2"/>
+                      <a:srgbClr val="FBECEF"/>
                     </a:solidFill>
                   </a:tcPr>
                 </a:tc>
@@ -4679,7 +4907,7 @@
                       <a:r>
                         <a:rPr sz="1500" b="0">
                           <a:solidFill>
-                            <a:srgbClr val="2B2B2B"/>
+                            <a:srgbClr val="26231F"/>
                           </a:solidFill>
                         </a:rPr>
                         <a:t/>
@@ -4689,30 +4917,30 @@
                   <a:tcPr anchor="ctr" marL="73152" marR="73152">
                     <a:lnL w="9525" cap="flat" cmpd="sng" algn="ctr">
                       <a:solidFill>
-                        <a:srgbClr val="F0D1D6"/>
+                        <a:srgbClr val="F6D5DA"/>
                       </a:solidFill>
                       <a:prstDash val="solid"/>
                     </a:lnL>
                     <a:lnR w="9525" cap="flat" cmpd="sng" algn="ctr">
                       <a:solidFill>
-                        <a:srgbClr val="F0D1D6"/>
+                        <a:srgbClr val="F6D5DA"/>
                       </a:solidFill>
                       <a:prstDash val="solid"/>
                     </a:lnR>
                     <a:lnT w="9525" cap="flat" cmpd="sng" algn="ctr">
                       <a:solidFill>
-                        <a:srgbClr val="F0D1D6"/>
+                        <a:srgbClr val="F6D5DA"/>
                       </a:solidFill>
                       <a:prstDash val="solid"/>
                     </a:lnT>
                     <a:lnB w="9525" cap="flat" cmpd="sng" algn="ctr">
                       <a:solidFill>
-                        <a:srgbClr val="F0D1D6"/>
+                        <a:srgbClr val="F6D5DA"/>
                       </a:solidFill>
                       <a:prstDash val="solid"/>
                     </a:lnB>
                     <a:solidFill>
-                      <a:srgbClr val="F9F0F2"/>
+                      <a:srgbClr val="FBECEF"/>
                     </a:solidFill>
                   </a:tcPr>
                 </a:tc>
@@ -4727,7 +4955,7 @@
                       <a:r>
                         <a:rPr sz="1500" b="1">
                           <a:solidFill>
-                            <a:srgbClr val="431920"/>
+                            <a:srgbClr val="49272D"/>
                           </a:solidFill>
                         </a:rPr>
                         <a:t>00:00</a:t>
@@ -4737,30 +4965,30 @@
                   <a:tcPr anchor="ctr" marL="73152" marR="73152">
                     <a:lnL w="9525" cap="flat" cmpd="sng" algn="ctr">
                       <a:solidFill>
-                        <a:srgbClr val="F0D1D6"/>
+                        <a:srgbClr val="F6D5DA"/>
                       </a:solidFill>
                       <a:prstDash val="solid"/>
                     </a:lnL>
                     <a:lnR w="9525" cap="flat" cmpd="sng" algn="ctr">
                       <a:solidFill>
-                        <a:srgbClr val="F0D1D6"/>
+                        <a:srgbClr val="F6D5DA"/>
                       </a:solidFill>
                       <a:prstDash val="solid"/>
                     </a:lnR>
                     <a:lnT w="9525" cap="flat" cmpd="sng" algn="ctr">
                       <a:solidFill>
-                        <a:srgbClr val="F0D1D6"/>
+                        <a:srgbClr val="F6D5DA"/>
                       </a:solidFill>
                       <a:prstDash val="solid"/>
                     </a:lnT>
                     <a:lnB w="9525" cap="flat" cmpd="sng" algn="ctr">
                       <a:solidFill>
-                        <a:srgbClr val="F0D1D6"/>
+                        <a:srgbClr val="F6D5DA"/>
                       </a:solidFill>
                       <a:prstDash val="solid"/>
                     </a:lnB>
                     <a:solidFill>
-                      <a:srgbClr val="F0D1D6"/>
+                      <a:srgbClr val="F6D5DA"/>
                     </a:solidFill>
                   </a:tcPr>
                 </a:tc>
@@ -4773,7 +5001,7 @@
                       <a:r>
                         <a:rPr sz="1500" b="0">
                           <a:solidFill>
-                            <a:srgbClr val="2B2B2B"/>
+                            <a:srgbClr val="26231F"/>
                           </a:solidFill>
                         </a:rPr>
                         <a:t>기념 촬영 · 식사</a:t>
@@ -4783,25 +5011,25 @@
                   <a:tcPr anchor="ctr" marL="73152" marR="73152">
                     <a:lnL w="9525" cap="flat" cmpd="sng" algn="ctr">
                       <a:solidFill>
-                        <a:srgbClr val="F0D1D6"/>
+                        <a:srgbClr val="F6D5DA"/>
                       </a:solidFill>
                       <a:prstDash val="solid"/>
                     </a:lnL>
                     <a:lnR w="9525" cap="flat" cmpd="sng" algn="ctr">
                       <a:solidFill>
-                        <a:srgbClr val="F0D1D6"/>
+                        <a:srgbClr val="F6D5DA"/>
                       </a:solidFill>
                       <a:prstDash val="solid"/>
                     </a:lnR>
                     <a:lnT w="9525" cap="flat" cmpd="sng" algn="ctr">
                       <a:solidFill>
-                        <a:srgbClr val="F0D1D6"/>
+                        <a:srgbClr val="F6D5DA"/>
                       </a:solidFill>
                       <a:prstDash val="solid"/>
                     </a:lnT>
                     <a:lnB w="9525" cap="flat" cmpd="sng" algn="ctr">
                       <a:solidFill>
-                        <a:srgbClr val="F0D1D6"/>
+                        <a:srgbClr val="F6D5DA"/>
                       </a:solidFill>
                       <a:prstDash val="solid"/>
                     </a:lnB>
@@ -4819,7 +5047,7 @@
                       <a:r>
                         <a:rPr sz="1500" b="0">
                           <a:solidFill>
-                            <a:srgbClr val="2B2B2B"/>
+                            <a:srgbClr val="26231F"/>
                           </a:solidFill>
                         </a:rPr>
                         <a:t/>
@@ -4829,25 +5057,25 @@
                   <a:tcPr anchor="ctr" marL="73152" marR="73152">
                     <a:lnL w="9525" cap="flat" cmpd="sng" algn="ctr">
                       <a:solidFill>
-                        <a:srgbClr val="F0D1D6"/>
+                        <a:srgbClr val="F6D5DA"/>
                       </a:solidFill>
                       <a:prstDash val="solid"/>
                     </a:lnL>
                     <a:lnR w="9525" cap="flat" cmpd="sng" algn="ctr">
                       <a:solidFill>
-                        <a:srgbClr val="F0D1D6"/>
+                        <a:srgbClr val="F6D5DA"/>
                       </a:solidFill>
                       <a:prstDash val="solid"/>
                     </a:lnR>
                     <a:lnT w="9525" cap="flat" cmpd="sng" algn="ctr">
                       <a:solidFill>
-                        <a:srgbClr val="F0D1D6"/>
+                        <a:srgbClr val="F6D5DA"/>
                       </a:solidFill>
                       <a:prstDash val="solid"/>
                     </a:lnT>
                     <a:lnB w="9525" cap="flat" cmpd="sng" algn="ctr">
                       <a:solidFill>
-                        <a:srgbClr val="F0D1D6"/>
+                        <a:srgbClr val="F6D5DA"/>
                       </a:solidFill>
                       <a:prstDash val="solid"/>
                     </a:lnB>
@@ -4895,14 +5123,14 @@
         </p:nvSpPr>
         <p:spPr>
           <a:xfrm>
-            <a:off x="-182880" y="6144768"/>
-            <a:ext cx="12557455" cy="731520"/>
-          </a:xfrm>
-          <a:prstGeom prst="wave">
+            <a:off x="0" y="6565392"/>
+            <a:ext cx="12191695" cy="292608"/>
+          </a:xfrm>
+          <a:prstGeom prst="rect">
             <a:avLst/>
           </a:prstGeom>
           <a:solidFill>
-            <a:srgbClr val="F0D1D6"/>
+            <a:srgbClr val="EBADB8"/>
           </a:solidFill>
           <a:ln>
             <a:noFill/>
@@ -4924,14 +5152,14 @@
         </p:nvSpPr>
         <p:spPr>
           <a:xfrm>
-            <a:off x="-182880" y="6400800"/>
-            <a:ext cx="12557455" cy="502920"/>
-          </a:xfrm>
-          <a:prstGeom prst="wave">
+            <a:off x="640080" y="6400800"/>
+            <a:ext cx="10911535" cy="10972"/>
+          </a:xfrm>
+          <a:prstGeom prst="rect">
             <a:avLst/>
           </a:prstGeom>
           <a:solidFill>
-            <a:srgbClr val="8D3443"/>
+            <a:srgbClr val="26231F"/>
           </a:solidFill>
           <a:ln>
             <a:noFill/>
@@ -4947,6 +5175,73 @@
       </p:sp>
       <p:sp>
         <p:nvSpPr>
+          <p:cNvPr id="5" name="하단 라벨"/>
+          <p:cNvSpPr txBox="1"/>
+          <p:nvPr/>
+        </p:nvSpPr>
+        <p:spPr>
+          <a:xfrm>
+            <a:off x="640080" y="6437376"/>
+            <a:ext cx="5486400" cy="274320"/>
+          </a:xfrm>
+          <a:prstGeom prst="rect">
+            <a:avLst/>
+          </a:prstGeom>
+          <a:noFill/>
+        </p:spPr>
+        <p:txBody>
+          <a:bodyPr wrap="square" lIns="54864" rIns="54864" tIns="27432" bIns="27432" anchor="ctr">
+            <a:noAutofit/>
+          </a:bodyPr>
+          <a:lstStyle/>
+          <a:p>
+            <a:pPr algn="l">
+              <a:lnSpc>
+                <a:spcPct val="115000"/>
+              </a:lnSpc>
+            </a:pPr>
+            <a:r>
+              <a:rPr sz="900" b="1" i="0" spc="250">
+                <a:solidFill>
+                  <a:srgbClr val="26231F"/>
+                </a:solidFill>
+              </a:rPr>
+              <a:t>WEDDING</a:t>
+            </a:r>
+          </a:p>
+        </p:txBody>
+      </p:sp>
+      <p:sp>
+        <p:nvSpPr>
+          <p:cNvPr id="6" name="포인트"/>
+          <p:cNvSpPr/>
+          <p:nvPr/>
+        </p:nvSpPr>
+        <p:spPr>
+          <a:xfrm>
+            <a:off x="11213287" y="6473952"/>
+            <a:ext cx="219456" cy="219456"/>
+          </a:xfrm>
+          <a:prstGeom prst="sun">
+            <a:avLst/>
+          </a:prstGeom>
+          <a:solidFill>
+            <a:srgbClr val="E198A4"/>
+          </a:solidFill>
+          <a:ln>
+            <a:noFill/>
+          </a:ln>
+        </p:spPr>
+        <p:txBody>
+          <a:bodyPr rtlCol="0" anchor="ctr"/>
+          <a:lstStyle/>
+          <a:p>
+            <a:pPr algn="ctr"/>
+          </a:p>
+        </p:txBody>
+      </p:sp>
+      <p:sp>
+        <p:nvSpPr>
           <p:cNvPr id="2" name="Title 1"/>
           <p:cNvSpPr>
             <a:spLocks noGrp="1"/>
@@ -4957,8 +5252,8 @@
         </p:nvSpPr>
         <p:spPr>
           <a:xfrm>
-            <a:off x="640080" y="457200"/>
-            <a:ext cx="9722815" cy="868680"/>
+            <a:off x="640080" y="502920"/>
+            <a:ext cx="10911535" cy="914400"/>
           </a:xfrm>
         </p:spPr>
         <p:txBody>
@@ -4975,7 +5270,7 @@
             <a:r>
               <a:rPr sz="3000" b="1" i="0">
                 <a:solidFill>
-                  <a:srgbClr val="431920"/>
+                  <a:srgbClr val="26231F"/>
                 </a:solidFill>
               </a:rPr>
               <a:t>하객 안내</a:t>
@@ -4985,26 +5280,26 @@
       </p:sp>
       <p:sp>
         <p:nvSpPr>
-          <p:cNvPr id="5" name="카드 1"/>
+          <p:cNvPr id="7" name="카드 1"/>
           <p:cNvSpPr/>
           <p:nvPr/>
         </p:nvSpPr>
         <p:spPr>
           <a:xfrm>
-            <a:off x="640080" y="1554480"/>
-            <a:ext cx="3484778" cy="4389120"/>
+            <a:off x="640080" y="1600200"/>
+            <a:ext cx="3484778" cy="4572000"/>
           </a:xfrm>
           <a:prstGeom prst="roundRect">
             <a:avLst>
-              <a:gd name="adj" fmla="val 8000"/>
+              <a:gd name="adj" fmla="val 7000"/>
             </a:avLst>
           </a:prstGeom>
           <a:solidFill>
-            <a:srgbClr val="F9F0F2"/>
+            <a:srgbClr val="FFFFFF"/>
           </a:solidFill>
-          <a:ln w="15875">
+          <a:ln w="12700">
             <a:solidFill>
-              <a:srgbClr val="F0D1D6"/>
+              <a:srgbClr val="EBADB8"/>
             </a:solidFill>
           </a:ln>
         </p:spPr>
@@ -5018,20 +5313,22 @@
       </p:sp>
       <p:sp>
         <p:nvSpPr>
-          <p:cNvPr id="6" name="번호 1"/>
+          <p:cNvPr id="8" name="번호 1"/>
           <p:cNvSpPr/>
           <p:nvPr/>
         </p:nvSpPr>
         <p:spPr>
           <a:xfrm>
-            <a:off x="822959" y="1737360"/>
+            <a:off x="822959" y="1783080"/>
             <a:ext cx="457200" cy="457200"/>
           </a:xfrm>
-          <a:prstGeom prst="ellipse">
-            <a:avLst/>
+          <a:prstGeom prst="roundRect">
+            <a:avLst>
+              <a:gd name="adj" fmla="val 25000"/>
+            </a:avLst>
           </a:prstGeom>
           <a:solidFill>
-            <a:srgbClr val="8D3443"/>
+            <a:srgbClr val="E198A4"/>
           </a:solidFill>
           <a:ln>
             <a:noFill/>
@@ -5051,7 +5348,7 @@
             <a:r>
               <a:rPr sz="1600" b="1" i="0">
                 <a:solidFill>
-                  <a:srgbClr val="FFFFFF"/>
+                  <a:srgbClr val="26231F"/>
                 </a:solidFill>
               </a:rPr>
               <a:t>1</a:t>
@@ -5061,13 +5358,13 @@
       </p:sp>
       <p:sp>
         <p:nvSpPr>
-          <p:cNvPr id="7" name="TextBox 6"/>
+          <p:cNvPr id="9" name="TextBox 8"/>
           <p:cNvSpPr txBox="1"/>
           <p:nvPr/>
         </p:nvSpPr>
         <p:spPr>
           <a:xfrm>
-            <a:off x="777240" y="2331720"/>
+            <a:off x="777240" y="2377440"/>
             <a:ext cx="3210458" cy="640080"/>
           </a:xfrm>
           <a:prstGeom prst="rect">
@@ -5089,7 +5386,7 @@
             <a:r>
               <a:rPr sz="1800" b="1" i="0">
                 <a:solidFill>
-                  <a:srgbClr val="431920"/>
+                  <a:srgbClr val="49272D"/>
                 </a:solidFill>
               </a:rPr>
               <a:t>주차 안내</a:t>
@@ -5099,14 +5396,14 @@
       </p:sp>
       <p:sp>
         <p:nvSpPr>
-          <p:cNvPr id="8" name="TextBox 7"/>
+          <p:cNvPr id="10" name="TextBox 9"/>
           <p:cNvSpPr txBox="1"/>
           <p:nvPr/>
         </p:nvSpPr>
         <p:spPr>
           <a:xfrm>
-            <a:off x="777240" y="3017520"/>
-            <a:ext cx="3210458" cy="2788920"/>
+            <a:off x="777240" y="3063240"/>
+            <a:ext cx="3210458" cy="2971800"/>
           </a:xfrm>
           <a:prstGeom prst="rect">
             <a:avLst/>
@@ -5127,7 +5424,7 @@
             <a:r>
               <a:rPr sz="1500" b="0" i="0">
                 <a:solidFill>
-                  <a:srgbClr val="2B2B2B"/>
+                  <a:srgbClr val="26231F"/>
                 </a:solidFill>
               </a:rPr>
               <a:t>입력하세요</a:t>
@@ -5137,26 +5434,26 @@
       </p:sp>
       <p:sp>
         <p:nvSpPr>
-          <p:cNvPr id="9" name="카드 2"/>
+          <p:cNvPr id="11" name="카드 2"/>
           <p:cNvSpPr/>
           <p:nvPr/>
         </p:nvSpPr>
         <p:spPr>
           <a:xfrm>
-            <a:off x="4353458" y="1554480"/>
-            <a:ext cx="3484778" cy="4389120"/>
+            <a:off x="4353458" y="1600200"/>
+            <a:ext cx="3484778" cy="4572000"/>
           </a:xfrm>
           <a:prstGeom prst="roundRect">
             <a:avLst>
-              <a:gd name="adj" fmla="val 8000"/>
+              <a:gd name="adj" fmla="val 7000"/>
             </a:avLst>
           </a:prstGeom>
           <a:solidFill>
-            <a:srgbClr val="F9F0F2"/>
+            <a:srgbClr val="FFFFFF"/>
           </a:solidFill>
-          <a:ln w="15875">
+          <a:ln w="12700">
             <a:solidFill>
-              <a:srgbClr val="F0D1D6"/>
+              <a:srgbClr val="EBADB8"/>
             </a:solidFill>
           </a:ln>
         </p:spPr>
@@ -5170,20 +5467,22 @@
       </p:sp>
       <p:sp>
         <p:nvSpPr>
-          <p:cNvPr id="10" name="번호 2"/>
+          <p:cNvPr id="12" name="번호 2"/>
           <p:cNvSpPr/>
           <p:nvPr/>
         </p:nvSpPr>
         <p:spPr>
           <a:xfrm>
-            <a:off x="4536338" y="1737360"/>
+            <a:off x="4536338" y="1783080"/>
             <a:ext cx="457200" cy="457200"/>
           </a:xfrm>
-          <a:prstGeom prst="ellipse">
-            <a:avLst/>
+          <a:prstGeom prst="roundRect">
+            <a:avLst>
+              <a:gd name="adj" fmla="val 25000"/>
+            </a:avLst>
           </a:prstGeom>
           <a:solidFill>
-            <a:srgbClr val="8D3443"/>
+            <a:srgbClr val="E198A4"/>
           </a:solidFill>
           <a:ln>
             <a:noFill/>
@@ -5203,7 +5502,7 @@
             <a:r>
               <a:rPr sz="1600" b="1" i="0">
                 <a:solidFill>
-                  <a:srgbClr val="FFFFFF"/>
+                  <a:srgbClr val="26231F"/>
                 </a:solidFill>
               </a:rPr>
               <a:t>2</a:t>
@@ -5213,13 +5512,13 @@
       </p:sp>
       <p:sp>
         <p:nvSpPr>
-          <p:cNvPr id="11" name="TextBox 10"/>
+          <p:cNvPr id="13" name="TextBox 12"/>
           <p:cNvSpPr txBox="1"/>
           <p:nvPr/>
         </p:nvSpPr>
         <p:spPr>
           <a:xfrm>
-            <a:off x="4490618" y="2331720"/>
+            <a:off x="4490618" y="2377440"/>
             <a:ext cx="3210458" cy="640080"/>
           </a:xfrm>
           <a:prstGeom prst="rect">
@@ -5241,7 +5540,7 @@
             <a:r>
               <a:rPr sz="1800" b="1" i="0">
                 <a:solidFill>
-                  <a:srgbClr val="431920"/>
+                  <a:srgbClr val="49272D"/>
                 </a:solidFill>
               </a:rPr>
               <a:t>식사 안내</a:t>
@@ -5251,14 +5550,14 @@
       </p:sp>
       <p:sp>
         <p:nvSpPr>
-          <p:cNvPr id="12" name="TextBox 11"/>
+          <p:cNvPr id="14" name="TextBox 13"/>
           <p:cNvSpPr txBox="1"/>
           <p:nvPr/>
         </p:nvSpPr>
         <p:spPr>
           <a:xfrm>
-            <a:off x="4490618" y="3017520"/>
-            <a:ext cx="3210458" cy="2788920"/>
+            <a:off x="4490618" y="3063240"/>
+            <a:ext cx="3210458" cy="2971800"/>
           </a:xfrm>
           <a:prstGeom prst="rect">
             <a:avLst/>
@@ -5279,7 +5578,7 @@
             <a:r>
               <a:rPr sz="1500" b="0" i="0">
                 <a:solidFill>
-                  <a:srgbClr val="2B2B2B"/>
+                  <a:srgbClr val="26231F"/>
                 </a:solidFill>
               </a:rPr>
               <a:t>입력하세요</a:t>
@@ -5289,26 +5588,26 @@
       </p:sp>
       <p:sp>
         <p:nvSpPr>
-          <p:cNvPr id="13" name="카드 3"/>
+          <p:cNvPr id="15" name="카드 3"/>
           <p:cNvSpPr/>
           <p:nvPr/>
         </p:nvSpPr>
         <p:spPr>
           <a:xfrm>
-            <a:off x="8066836" y="1554480"/>
-            <a:ext cx="3484778" cy="4389120"/>
+            <a:off x="8066836" y="1600200"/>
+            <a:ext cx="3484778" cy="4572000"/>
           </a:xfrm>
           <a:prstGeom prst="roundRect">
             <a:avLst>
-              <a:gd name="adj" fmla="val 8000"/>
+              <a:gd name="adj" fmla="val 7000"/>
             </a:avLst>
           </a:prstGeom>
           <a:solidFill>
-            <a:srgbClr val="F9F0F2"/>
+            <a:srgbClr val="FFFFFF"/>
           </a:solidFill>
-          <a:ln w="15875">
+          <a:ln w="12700">
             <a:solidFill>
-              <a:srgbClr val="F0D1D6"/>
+              <a:srgbClr val="EBADB8"/>
             </a:solidFill>
           </a:ln>
         </p:spPr>
@@ -5322,20 +5621,22 @@
       </p:sp>
       <p:sp>
         <p:nvSpPr>
-          <p:cNvPr id="14" name="번호 3"/>
+          <p:cNvPr id="16" name="번호 3"/>
           <p:cNvSpPr/>
           <p:nvPr/>
         </p:nvSpPr>
         <p:spPr>
           <a:xfrm>
-            <a:off x="8249716" y="1737360"/>
+            <a:off x="8249716" y="1783080"/>
             <a:ext cx="457200" cy="457200"/>
           </a:xfrm>
-          <a:prstGeom prst="ellipse">
-            <a:avLst/>
+          <a:prstGeom prst="roundRect">
+            <a:avLst>
+              <a:gd name="adj" fmla="val 25000"/>
+            </a:avLst>
           </a:prstGeom>
           <a:solidFill>
-            <a:srgbClr val="8D3443"/>
+            <a:srgbClr val="E198A4"/>
           </a:solidFill>
           <a:ln>
             <a:noFill/>
@@ -5355,7 +5656,7 @@
             <a:r>
               <a:rPr sz="1600" b="1" i="0">
                 <a:solidFill>
-                  <a:srgbClr val="FFFFFF"/>
+                  <a:srgbClr val="26231F"/>
                 </a:solidFill>
               </a:rPr>
               <a:t>3</a:t>
@@ -5365,13 +5666,13 @@
       </p:sp>
       <p:sp>
         <p:nvSpPr>
-          <p:cNvPr id="15" name="TextBox 14"/>
+          <p:cNvPr id="17" name="TextBox 16"/>
           <p:cNvSpPr txBox="1"/>
           <p:nvPr/>
         </p:nvSpPr>
         <p:spPr>
           <a:xfrm>
-            <a:off x="8203996" y="2331720"/>
+            <a:off x="8203996" y="2377440"/>
             <a:ext cx="3210458" cy="640080"/>
           </a:xfrm>
           <a:prstGeom prst="rect">
@@ -5393,7 +5694,7 @@
             <a:r>
               <a:rPr sz="1800" b="1" i="0">
                 <a:solidFill>
-                  <a:srgbClr val="431920"/>
+                  <a:srgbClr val="49272D"/>
                 </a:solidFill>
               </a:rPr>
               <a:t>기념 촬영</a:t>
@@ -5403,14 +5704,14 @@
       </p:sp>
       <p:sp>
         <p:nvSpPr>
-          <p:cNvPr id="16" name="TextBox 15"/>
+          <p:cNvPr id="18" name="TextBox 17"/>
           <p:cNvSpPr txBox="1"/>
           <p:nvPr/>
         </p:nvSpPr>
         <p:spPr>
           <a:xfrm>
-            <a:off x="8203996" y="3017520"/>
-            <a:ext cx="3210458" cy="2788920"/>
+            <a:off x="8203996" y="3063240"/>
+            <a:ext cx="3210458" cy="2971800"/>
           </a:xfrm>
           <a:prstGeom prst="rect">
             <a:avLst/>
@@ -5431,7 +5732,7 @@
             <a:r>
               <a:rPr sz="1500" b="0" i="0">
                 <a:solidFill>
-                  <a:srgbClr val="2B2B2B"/>
+                  <a:srgbClr val="26231F"/>
                 </a:solidFill>
               </a:rPr>
               <a:t>입력하세요</a:t>
@@ -5473,14 +5774,14 @@
         </p:nvSpPr>
         <p:spPr>
           <a:xfrm>
-            <a:off x="-182880" y="6144768"/>
-            <a:ext cx="12557455" cy="731520"/>
-          </a:xfrm>
-          <a:prstGeom prst="wave">
+            <a:off x="0" y="6565392"/>
+            <a:ext cx="12191695" cy="292608"/>
+          </a:xfrm>
+          <a:prstGeom prst="rect">
             <a:avLst/>
           </a:prstGeom>
           <a:solidFill>
-            <a:srgbClr val="F0D1D6"/>
+            <a:srgbClr val="EBADB8"/>
           </a:solidFill>
           <a:ln>
             <a:noFill/>
@@ -5502,14 +5803,14 @@
         </p:nvSpPr>
         <p:spPr>
           <a:xfrm>
-            <a:off x="-182880" y="6400800"/>
-            <a:ext cx="12557455" cy="502920"/>
-          </a:xfrm>
-          <a:prstGeom prst="wave">
+            <a:off x="640080" y="6400800"/>
+            <a:ext cx="10911535" cy="10972"/>
+          </a:xfrm>
+          <a:prstGeom prst="rect">
             <a:avLst/>
           </a:prstGeom>
           <a:solidFill>
-            <a:srgbClr val="8D3443"/>
+            <a:srgbClr val="26231F"/>
           </a:solidFill>
           <a:ln>
             <a:noFill/>
@@ -5525,6 +5826,73 @@
       </p:sp>
       <p:sp>
         <p:nvSpPr>
+          <p:cNvPr id="5" name="하단 라벨"/>
+          <p:cNvSpPr txBox="1"/>
+          <p:nvPr/>
+        </p:nvSpPr>
+        <p:spPr>
+          <a:xfrm>
+            <a:off x="640080" y="6437376"/>
+            <a:ext cx="5486400" cy="274320"/>
+          </a:xfrm>
+          <a:prstGeom prst="rect">
+            <a:avLst/>
+          </a:prstGeom>
+          <a:noFill/>
+        </p:spPr>
+        <p:txBody>
+          <a:bodyPr wrap="square" lIns="54864" rIns="54864" tIns="27432" bIns="27432" anchor="ctr">
+            <a:noAutofit/>
+          </a:bodyPr>
+          <a:lstStyle/>
+          <a:p>
+            <a:pPr algn="l">
+              <a:lnSpc>
+                <a:spcPct val="115000"/>
+              </a:lnSpc>
+            </a:pPr>
+            <a:r>
+              <a:rPr sz="900" b="1" i="0" spc="250">
+                <a:solidFill>
+                  <a:srgbClr val="26231F"/>
+                </a:solidFill>
+              </a:rPr>
+              <a:t>WEDDING</a:t>
+            </a:r>
+          </a:p>
+        </p:txBody>
+      </p:sp>
+      <p:sp>
+        <p:nvSpPr>
+          <p:cNvPr id="6" name="포인트"/>
+          <p:cNvSpPr/>
+          <p:nvPr/>
+        </p:nvSpPr>
+        <p:spPr>
+          <a:xfrm>
+            <a:off x="11213287" y="6473952"/>
+            <a:ext cx="219456" cy="219456"/>
+          </a:xfrm>
+          <a:prstGeom prst="sun">
+            <a:avLst/>
+          </a:prstGeom>
+          <a:solidFill>
+            <a:srgbClr val="E198A4"/>
+          </a:solidFill>
+          <a:ln>
+            <a:noFill/>
+          </a:ln>
+        </p:spPr>
+        <p:txBody>
+          <a:bodyPr rtlCol="0" anchor="ctr"/>
+          <a:lstStyle/>
+          <a:p>
+            <a:pPr algn="ctr"/>
+          </a:p>
+        </p:txBody>
+      </p:sp>
+      <p:sp>
+        <p:nvSpPr>
           <p:cNvPr id="2" name="Title 1"/>
           <p:cNvSpPr>
             <a:spLocks noGrp="1"/>
@@ -5535,8 +5903,8 @@
         </p:nvSpPr>
         <p:spPr>
           <a:xfrm>
-            <a:off x="640080" y="457200"/>
-            <a:ext cx="9722815" cy="868680"/>
+            <a:off x="640080" y="502920"/>
+            <a:ext cx="10911535" cy="914400"/>
           </a:xfrm>
         </p:spPr>
         <p:txBody>
@@ -5553,7 +5921,7 @@
             <a:r>
               <a:rPr sz="3000" b="1" i="0">
                 <a:solidFill>
-                  <a:srgbClr val="431920"/>
+                  <a:srgbClr val="26231F"/>
                 </a:solidFill>
               </a:rPr>
               <a:t>웨딩 사진</a:t>
@@ -5563,14 +5931,14 @@
       </p:sp>
       <p:sp>
         <p:nvSpPr>
-          <p:cNvPr id="5" name="사진 자리"/>
+          <p:cNvPr id="7" name="사진 자리"/>
           <p:cNvSpPr/>
           <p:nvPr/>
         </p:nvSpPr>
         <p:spPr>
           <a:xfrm>
-            <a:off x="640080" y="1554480"/>
-            <a:ext cx="3515258" cy="2103120"/>
+            <a:off x="640080" y="1600200"/>
+            <a:ext cx="3515258" cy="2194560"/>
           </a:xfrm>
           <a:prstGeom prst="roundRect">
             <a:avLst>
@@ -5578,12 +5946,10 @@
             </a:avLst>
           </a:prstGeom>
           <a:solidFill>
-            <a:srgbClr val="F0D1D6"/>
+            <a:srgbClr val="F6D5DA"/>
           </a:solidFill>
           <a:ln w="19050">
-            <a:solidFill>
-              <a:srgbClr val="8D3443"/>
-            </a:solidFill>
+            <a:noFill/>
             <a:prstDash val="dash"/>
           </a:ln>
         </p:spPr>
@@ -5601,7 +5967,7 @@
             <a:r>
               <a:rPr sz="1200" b="0" i="0">
                 <a:solidFill>
-                  <a:srgbClr val="431920"/>
+                  <a:srgbClr val="8E8780"/>
                 </a:solidFill>
               </a:rPr>
               <a:t>사진 1</a:t>
@@ -5611,14 +5977,14 @@
       </p:sp>
       <p:sp>
         <p:nvSpPr>
-          <p:cNvPr id="6" name="사진 자리"/>
+          <p:cNvPr id="8" name="사진 자리"/>
           <p:cNvSpPr/>
           <p:nvPr/>
         </p:nvSpPr>
         <p:spPr>
           <a:xfrm>
-            <a:off x="4338218" y="1554480"/>
-            <a:ext cx="3515258" cy="2103120"/>
+            <a:off x="4338218" y="1600200"/>
+            <a:ext cx="3515258" cy="2194560"/>
           </a:xfrm>
           <a:prstGeom prst="roundRect">
             <a:avLst>
@@ -5626,12 +5992,10 @@
             </a:avLst>
           </a:prstGeom>
           <a:solidFill>
-            <a:srgbClr val="F0D1D6"/>
+            <a:srgbClr val="F6D5DA"/>
           </a:solidFill>
           <a:ln w="19050">
-            <a:solidFill>
-              <a:srgbClr val="8D3443"/>
-            </a:solidFill>
+            <a:noFill/>
             <a:prstDash val="dash"/>
           </a:ln>
         </p:spPr>
@@ -5649,7 +6013,7 @@
             <a:r>
               <a:rPr sz="1200" b="0" i="0">
                 <a:solidFill>
-                  <a:srgbClr val="431920"/>
+                  <a:srgbClr val="8E8780"/>
                 </a:solidFill>
               </a:rPr>
               <a:t>사진 2</a:t>
@@ -5659,14 +6023,14 @@
       </p:sp>
       <p:sp>
         <p:nvSpPr>
-          <p:cNvPr id="7" name="사진 자리"/>
+          <p:cNvPr id="9" name="사진 자리"/>
           <p:cNvSpPr/>
           <p:nvPr/>
         </p:nvSpPr>
         <p:spPr>
           <a:xfrm>
-            <a:off x="8036356" y="1554480"/>
-            <a:ext cx="3515258" cy="2103120"/>
+            <a:off x="8036356" y="1600200"/>
+            <a:ext cx="3515258" cy="2194560"/>
           </a:xfrm>
           <a:prstGeom prst="roundRect">
             <a:avLst>
@@ -5674,12 +6038,10 @@
             </a:avLst>
           </a:prstGeom>
           <a:solidFill>
-            <a:srgbClr val="F0D1D6"/>
+            <a:srgbClr val="F6D5DA"/>
           </a:solidFill>
           <a:ln w="19050">
-            <a:solidFill>
-              <a:srgbClr val="8D3443"/>
-            </a:solidFill>
+            <a:noFill/>
             <a:prstDash val="dash"/>
           </a:ln>
         </p:spPr>
@@ -5697,7 +6059,7 @@
             <a:r>
               <a:rPr sz="1200" b="0" i="0">
                 <a:solidFill>
-                  <a:srgbClr val="431920"/>
+                  <a:srgbClr val="8E8780"/>
                 </a:solidFill>
               </a:rPr>
               <a:t>사진 3</a:t>
@@ -5707,14 +6069,14 @@
       </p:sp>
       <p:sp>
         <p:nvSpPr>
-          <p:cNvPr id="8" name="사진 자리"/>
+          <p:cNvPr id="10" name="사진 자리"/>
           <p:cNvSpPr/>
           <p:nvPr/>
         </p:nvSpPr>
         <p:spPr>
           <a:xfrm>
-            <a:off x="640080" y="3840480"/>
-            <a:ext cx="3515258" cy="2103120"/>
+            <a:off x="640080" y="3977639"/>
+            <a:ext cx="3515258" cy="2194560"/>
           </a:xfrm>
           <a:prstGeom prst="roundRect">
             <a:avLst>
@@ -5722,12 +6084,10 @@
             </a:avLst>
           </a:prstGeom>
           <a:solidFill>
-            <a:srgbClr val="F0D1D6"/>
+            <a:srgbClr val="F6D5DA"/>
           </a:solidFill>
           <a:ln w="19050">
-            <a:solidFill>
-              <a:srgbClr val="8D3443"/>
-            </a:solidFill>
+            <a:noFill/>
             <a:prstDash val="dash"/>
           </a:ln>
         </p:spPr>
@@ -5745,7 +6105,7 @@
             <a:r>
               <a:rPr sz="1200" b="0" i="0">
                 <a:solidFill>
-                  <a:srgbClr val="431920"/>
+                  <a:srgbClr val="8E8780"/>
                 </a:solidFill>
               </a:rPr>
               <a:t>사진 4</a:t>
@@ -5755,14 +6115,14 @@
       </p:sp>
       <p:sp>
         <p:nvSpPr>
-          <p:cNvPr id="9" name="사진 자리"/>
+          <p:cNvPr id="11" name="사진 자리"/>
           <p:cNvSpPr/>
           <p:nvPr/>
         </p:nvSpPr>
         <p:spPr>
           <a:xfrm>
-            <a:off x="4338218" y="3840480"/>
-            <a:ext cx="3515258" cy="2103120"/>
+            <a:off x="4338218" y="3977639"/>
+            <a:ext cx="3515258" cy="2194560"/>
           </a:xfrm>
           <a:prstGeom prst="roundRect">
             <a:avLst>
@@ -5770,12 +6130,10 @@
             </a:avLst>
           </a:prstGeom>
           <a:solidFill>
-            <a:srgbClr val="F0D1D6"/>
+            <a:srgbClr val="F6D5DA"/>
           </a:solidFill>
           <a:ln w="19050">
-            <a:solidFill>
-              <a:srgbClr val="8D3443"/>
-            </a:solidFill>
+            <a:noFill/>
             <a:prstDash val="dash"/>
           </a:ln>
         </p:spPr>
@@ -5793,7 +6151,7 @@
             <a:r>
               <a:rPr sz="1200" b="0" i="0">
                 <a:solidFill>
-                  <a:srgbClr val="431920"/>
+                  <a:srgbClr val="8E8780"/>
                 </a:solidFill>
               </a:rPr>
               <a:t>사진 5</a:t>
@@ -5803,14 +6161,14 @@
       </p:sp>
       <p:sp>
         <p:nvSpPr>
-          <p:cNvPr id="10" name="사진 자리"/>
+          <p:cNvPr id="12" name="사진 자리"/>
           <p:cNvSpPr/>
           <p:nvPr/>
         </p:nvSpPr>
         <p:spPr>
           <a:xfrm>
-            <a:off x="8036356" y="3840480"/>
-            <a:ext cx="3515258" cy="2103120"/>
+            <a:off x="8036356" y="3977639"/>
+            <a:ext cx="3515258" cy="2194560"/>
           </a:xfrm>
           <a:prstGeom prst="roundRect">
             <a:avLst>
@@ -5818,12 +6176,10 @@
             </a:avLst>
           </a:prstGeom>
           <a:solidFill>
-            <a:srgbClr val="F0D1D6"/>
+            <a:srgbClr val="F6D5DA"/>
           </a:solidFill>
           <a:ln w="19050">
-            <a:solidFill>
-              <a:srgbClr val="8D3443"/>
-            </a:solidFill>
+            <a:noFill/>
             <a:prstDash val="dash"/>
           </a:ln>
         </p:spPr>
@@ -5841,7 +6197,7 @@
             <a:r>
               <a:rPr sz="1200" b="0" i="0">
                 <a:solidFill>
-                  <a:srgbClr val="431920"/>
+                  <a:srgbClr val="8E8780"/>
                 </a:solidFill>
               </a:rPr>
               <a:t>사진 6</a:t>
@@ -5860,6 +6216,14 @@
 <file path=ppt/slides/slide6.xml><?xml version="1.0" encoding="utf-8"?>
 <p:sld xmlns:a="http://schemas.openxmlformats.org/drawingml/2006/main" xmlns:p="http://schemas.openxmlformats.org/presentationml/2006/main" xmlns:r="http://schemas.openxmlformats.org/officeDocument/2006/relationships">
   <p:cSld>
+    <p:bg>
+      <p:bgPr>
+        <a:solidFill>
+          <a:srgbClr val="F6D5DA"/>
+        </a:solidFill>
+        <a:effectLst/>
+      </p:bgPr>
+    </p:bg>
     <p:spTree>
       <p:nvGrpSpPr>
         <p:cNvPr id="1" name=""/>
@@ -5867,30 +6231,120 @@
         <p:nvPr/>
       </p:nvGrpSpPr>
       <p:grpSpPr/>
-      <p:pic>
-        <p:nvPicPr>
-          <p:cNvPr id="3" name="표지 그림" descr="wedding-43.jpg"/>
-          <p:cNvPicPr>
-            <a:picLocks noChangeAspect="1"/>
-          </p:cNvPicPr>
+      <p:sp>
+        <p:nvSpPr>
+          <p:cNvPr id="3" name="사진 자리"/>
+          <p:cNvSpPr/>
           <p:nvPr/>
-        </p:nvPicPr>
-        <p:blipFill>
-          <a:blip r:embed="rId2"/>
-          <a:stretch>
-            <a:fillRect/>
-          </a:stretch>
-        </p:blipFill>
-        <p:spPr>
-          <a:xfrm>
-            <a:off x="0" y="0"/>
-            <a:ext cx="12191695" cy="6858000"/>
+        </p:nvSpPr>
+        <p:spPr>
+          <a:xfrm>
+            <a:off x="7071183" y="960120"/>
+            <a:ext cx="3657508" cy="4526280"/>
+          </a:xfrm>
+          <a:prstGeom prst="roundRect">
+            <a:avLst>
+              <a:gd name="adj" fmla="val 4000"/>
+            </a:avLst>
+          </a:prstGeom>
+          <a:solidFill>
+            <a:srgbClr val="EBADB8"/>
+          </a:solidFill>
+          <a:ln>
+            <a:noFill/>
+          </a:ln>
+        </p:spPr>
+        <p:txBody>
+          <a:bodyPr rtlCol="0" anchor="ctr" wrap="square" lIns="54864" rIns="54864" tIns="27432" bIns="27432">
+            <a:noAutofit/>
+          </a:bodyPr>
+          <a:lstStyle/>
+          <a:p>
+            <a:pPr algn="ctr">
+              <a:lnSpc>
+                <a:spcPct val="100000"/>
+              </a:lnSpc>
+            </a:pPr>
+            <a:r>
+              <a:rPr sz="1400" b="0" i="0">
+                <a:solidFill>
+                  <a:srgbClr val="49272D"/>
+                </a:solidFill>
+              </a:rPr>
+              <a:t>사진을 넣어 주세요</a:t>
+            </a:r>
+          </a:p>
+        </p:txBody>
+      </p:sp>
+      <p:sp>
+        <p:nvSpPr>
+          <p:cNvPr id="4" name="장식"/>
+          <p:cNvSpPr/>
+          <p:nvPr/>
+        </p:nvSpPr>
+        <p:spPr>
+          <a:xfrm>
+            <a:off x="7558851" y="1234439"/>
+            <a:ext cx="3657508" cy="4526280"/>
+          </a:xfrm>
+          <a:prstGeom prst="roundRect">
+            <a:avLst>
+              <a:gd name="adj" fmla="val 4000"/>
+            </a:avLst>
+          </a:prstGeom>
+          <a:noFill/>
+          <a:ln w="9525">
+            <a:solidFill>
+              <a:srgbClr val="26231F"/>
+            </a:solidFill>
+          </a:ln>
+        </p:spPr>
+        <p:txBody>
+          <a:bodyPr rtlCol="0" anchor="ctr"/>
+          <a:lstStyle/>
+          <a:p>
+            <a:pPr algn="ctr"/>
+          </a:p>
+        </p:txBody>
+      </p:sp>
+      <p:sp>
+        <p:nvSpPr>
+          <p:cNvPr id="5" name="라벨"/>
+          <p:cNvSpPr txBox="1"/>
+          <p:nvPr/>
+        </p:nvSpPr>
+        <p:spPr>
+          <a:xfrm>
+            <a:off x="822960" y="2148840"/>
+            <a:ext cx="5608179" cy="274320"/>
           </a:xfrm>
           <a:prstGeom prst="rect">
             <a:avLst/>
           </a:prstGeom>
-        </p:spPr>
-      </p:pic>
+          <a:noFill/>
+        </p:spPr>
+        <p:txBody>
+          <a:bodyPr wrap="square" lIns="54864" rIns="54864" tIns="27432" bIns="27432" anchor="t">
+            <a:noAutofit/>
+          </a:bodyPr>
+          <a:lstStyle/>
+          <a:p>
+            <a:pPr algn="l">
+              <a:lnSpc>
+                <a:spcPct val="115000"/>
+              </a:lnSpc>
+            </a:pPr>
+            <a:r>
+              <a:rPr sz="1000" b="1" i="0" spc="250">
+                <a:solidFill>
+                  <a:srgbClr val="26231F"/>
+                </a:solidFill>
+              </a:rPr>
+              <a:t>WEDDING</a:t>
+            </a:r>
+          </a:p>
+        </p:txBody>
+      </p:sp>
       <p:sp>
         <p:nvSpPr>
           <p:cNvPr id="2" name="Title 1"/>
@@ -5903,8 +6357,8 @@
         </p:nvSpPr>
         <p:spPr>
           <a:xfrm>
-            <a:off x="853418" y="2057400"/>
-            <a:ext cx="6095847" cy="1554480"/>
+            <a:off x="822960" y="2606040"/>
+            <a:ext cx="5608179" cy="1188720"/>
           </a:xfrm>
         </p:spPr>
         <p:txBody>
@@ -5921,7 +6375,7 @@
             <a:r>
               <a:rPr sz="3400" b="1" i="0">
                 <a:solidFill>
-                  <a:srgbClr val="431920"/>
+                  <a:srgbClr val="26231F"/>
                 </a:solidFill>
               </a:rPr>
               <a:t>와 주셔서 고맙습니다</a:t>
@@ -5931,14 +6385,14 @@
       </p:sp>
       <p:sp>
         <p:nvSpPr>
-          <p:cNvPr id="4" name="한 줄 문구"/>
+          <p:cNvPr id="6" name="한 줄 문구"/>
           <p:cNvSpPr txBox="1"/>
           <p:nvPr/>
         </p:nvSpPr>
         <p:spPr>
           <a:xfrm>
-            <a:off x="853418" y="3749039"/>
-            <a:ext cx="6095847" cy="822960"/>
+            <a:off x="822960" y="3886200"/>
+            <a:ext cx="5608179" cy="822960"/>
           </a:xfrm>
           <a:prstGeom prst="rect">
             <a:avLst/>
@@ -5957,9 +6411,9 @@
               </a:lnSpc>
             </a:pPr>
             <a:r>
-              <a:rPr sz="1700" b="0" i="1">
+              <a:rPr sz="1700" b="0" i="0">
                 <a:solidFill>
-                  <a:srgbClr val="431920"/>
+                  <a:srgbClr val="26231F"/>
                 </a:solidFill>
               </a:rPr>
               <a:t>잘 살겠습니다</a:t>
@@ -5969,14 +6423,14 @@
       </p:sp>
       <p:sp>
         <p:nvSpPr>
-          <p:cNvPr id="5" name="안내 문구"/>
+          <p:cNvPr id="7" name="안내 문구"/>
           <p:cNvSpPr txBox="1"/>
           <p:nvPr/>
         </p:nvSpPr>
         <p:spPr>
           <a:xfrm>
-            <a:off x="853418" y="4617720"/>
-            <a:ext cx="6095847" cy="914400"/>
+            <a:off x="822960" y="4754880"/>
+            <a:ext cx="5608179" cy="914400"/>
           </a:xfrm>
           <a:prstGeom prst="rect">
             <a:avLst/>
@@ -5997,7 +6451,7 @@
             <a:r>
               <a:rPr sz="1400" b="0" i="0">
                 <a:solidFill>
-                  <a:srgbClr val="666666"/>
+                  <a:srgbClr val="26231F"/>
                 </a:solidFill>
               </a:rPr>
               <a:t>신랑 이름 ♥ 신부 이름</a:t>
@@ -6024,34 +6478,34 @@
         <a:sysClr val="window" lastClr="FFFFFF"/>
       </a:lt1>
       <a:dk2>
-        <a:srgbClr val="431920"/>
+        <a:srgbClr val="49272D"/>
       </a:dk2>
       <a:lt2>
-        <a:srgbClr val="F9F0F2"/>
+        <a:srgbClr val="FBECEF"/>
       </a:lt2>
       <a:accent1>
-        <a:srgbClr val="8D3443"/>
+        <a:srgbClr val="E198A4"/>
       </a:accent1>
       <a:accent2>
-        <a:srgbClr val="3B9158"/>
+        <a:srgbClr val="EAC7B8"/>
       </a:accent2>
       <a:accent3>
-        <a:srgbClr val="431920"/>
+        <a:srgbClr val="49272D"/>
       </a:accent3>
       <a:accent4>
-        <a:srgbClr val="F0D1D6"/>
+        <a:srgbClr val="F6D5DA"/>
       </a:accent4>
       <a:accent5>
-        <a:srgbClr val="64624E"/>
+        <a:srgbClr val="E6B0AE"/>
       </a:accent5>
       <a:accent6>
-        <a:srgbClr val="8E7579"/>
+        <a:srgbClr val="927D81"/>
       </a:accent6>
       <a:hlink>
-        <a:srgbClr val="8D3443"/>
+        <a:srgbClr val="E198A4"/>
       </a:hlink>
       <a:folHlink>
-        <a:srgbClr val="431920"/>
+        <a:srgbClr val="49272D"/>
       </a:folHlink>
     </a:clrScheme>
     <a:fontScheme name="Office">
